--- a/sidemeetings/ietf125/3-Transport Layer OAM Protocol Considerations-CMCC.pptx
+++ b/sidemeetings/ietf125/3-Transport Layer OAM Protocol Considerations-CMCC.pptx
@@ -5,16 +5,16 @@
     <p:sldMasterId id="2147483648" r:id="rId1"/>
   </p:sldMasterIdLst>
   <p:notesMasterIdLst>
-    <p:notesMasterId r:id="rId9"/>
+    <p:notesMasterId r:id="rId4"/>
   </p:notesMasterIdLst>
   <p:sldIdLst>
-    <p:sldId id="256" r:id="rId2"/>
-    <p:sldId id="270" r:id="rId3"/>
-    <p:sldId id="272" r:id="rId4"/>
-    <p:sldId id="258" r:id="rId5"/>
-    <p:sldId id="271" r:id="rId6"/>
-    <p:sldId id="260" r:id="rId7"/>
-    <p:sldId id="263" r:id="rId8"/>
+    <p:sldId id="256" r:id="rId3"/>
+    <p:sldId id="270" r:id="rId5"/>
+    <p:sldId id="272" r:id="rId6"/>
+    <p:sldId id="258" r:id="rId7"/>
+    <p:sldId id="271" r:id="rId8"/>
+    <p:sldId id="260" r:id="rId9"/>
+    <p:sldId id="263" r:id="rId10"/>
   </p:sldIdLst>
   <p:sldSz cx="12192000" cy="6858000"/>
   <p:notesSz cx="6858000" cy="9144000"/>
@@ -227,7 +227,6 @@
           <a:p>
             <a:fld id="{BF770FE8-58DE-4A1E-BD78-344F750F6B4C}" type="datetimeFigureOut">
               <a:rPr lang="zh-CN" altLang="en-US" smtClean="0"/>
-              <a:t>2026/3/13</a:t>
             </a:fld>
             <a:endParaRPr lang="zh-CN" altLang="en-US"/>
           </a:p>
@@ -294,6 +293,7 @@
               <a:rPr lang="zh-CN" altLang="en-US"/>
               <a:t>单击此处编辑母版文本样式</a:t>
             </a:r>
+            <a:endParaRPr lang="zh-CN" altLang="en-US"/>
           </a:p>
           <a:p>
             <a:pPr lvl="1"/>
@@ -301,6 +301,7 @@
               <a:rPr lang="zh-CN" altLang="en-US"/>
               <a:t>二级</a:t>
             </a:r>
+            <a:endParaRPr lang="zh-CN" altLang="en-US"/>
           </a:p>
           <a:p>
             <a:pPr lvl="2"/>
@@ -308,6 +309,7 @@
               <a:rPr lang="zh-CN" altLang="en-US"/>
               <a:t>三级</a:t>
             </a:r>
+            <a:endParaRPr lang="zh-CN" altLang="en-US"/>
           </a:p>
           <a:p>
             <a:pPr lvl="3"/>
@@ -315,6 +317,7 @@
               <a:rPr lang="zh-CN" altLang="en-US"/>
               <a:t>四级</a:t>
             </a:r>
+            <a:endParaRPr lang="zh-CN" altLang="en-US"/>
           </a:p>
           <a:p>
             <a:pPr lvl="4"/>
@@ -322,6 +325,7 @@
               <a:rPr lang="zh-CN" altLang="en-US"/>
               <a:t>五级</a:t>
             </a:r>
+            <a:endParaRPr lang="zh-CN" altLang="en-US"/>
           </a:p>
         </p:txBody>
       </p:sp>
@@ -385,7 +389,6 @@
           <a:p>
             <a:fld id="{1B84D0E0-B946-42B8-9D7A-E1EB52C368BF}" type="slidenum">
               <a:rPr lang="zh-CN" altLang="en-US" smtClean="0"/>
-              <a:t>‹#›</a:t>
             </a:fld>
             <a:endParaRPr lang="zh-CN" altLang="en-US"/>
           </a:p>
@@ -554,7 +557,6 @@
           <a:p>
             <a:fld id="{1B84D0E0-B946-42B8-9D7A-E1EB52C368BF}" type="slidenum">
               <a:rPr lang="zh-CN" altLang="en-US" smtClean="0"/>
-              <a:t>1</a:t>
             </a:fld>
             <a:endParaRPr lang="zh-CN" altLang="en-US"/>
           </a:p>
@@ -609,6 +611,7 @@
               <a:rPr lang="en-US"/>
               <a:t>Click to edit Master title style</a:t>
             </a:r>
+            <a:endParaRPr lang="en-US"/>
           </a:p>
         </p:txBody>
       </p:sp>
@@ -727,6 +730,7 @@
               <a:rPr lang="en-US"/>
               <a:t>Click to edit Master subtitle style</a:t>
             </a:r>
+            <a:endParaRPr lang="en-US"/>
           </a:p>
         </p:txBody>
       </p:sp>
@@ -747,7 +751,6 @@
           <a:p>
             <a:fld id="{5BCAD085-E8A6-8845-BD4E-CB4CCA059FC4}" type="datetimeFigureOut">
               <a:rPr lang="en-US" smtClean="0"/>
-              <a:t>3/13/2026</a:t>
             </a:fld>
             <a:endParaRPr lang="en-US"/>
           </a:p>
@@ -789,7 +792,6 @@
           <a:p>
             <a:fld id="{C1FF6DA9-008F-8B48-92A6-B652298478BF}" type="slidenum">
               <a:rPr lang="en-US" smtClean="0"/>
-              <a:t>‹#›</a:t>
             </a:fld>
             <a:endParaRPr lang="en-US"/>
           </a:p>
@@ -839,6 +841,7 @@
               <a:rPr lang="en-US"/>
               <a:t>Click to edit Master title style</a:t>
             </a:r>
+            <a:endParaRPr lang="en-US"/>
           </a:p>
         </p:txBody>
       </p:sp>
@@ -862,6 +865,7 @@
               <a:rPr lang="en-US"/>
               <a:t>Click to edit Master text styles</a:t>
             </a:r>
+            <a:endParaRPr lang="en-US"/>
           </a:p>
           <a:p>
             <a:pPr lvl="1"/>
@@ -869,6 +873,7 @@
               <a:rPr lang="en-US"/>
               <a:t>Second level</a:t>
             </a:r>
+            <a:endParaRPr lang="en-US"/>
           </a:p>
           <a:p>
             <a:pPr lvl="2"/>
@@ -876,6 +881,7 @@
               <a:rPr lang="en-US"/>
               <a:t>Third level</a:t>
             </a:r>
+            <a:endParaRPr lang="en-US"/>
           </a:p>
           <a:p>
             <a:pPr lvl="3"/>
@@ -883,6 +889,7 @@
               <a:rPr lang="en-US"/>
               <a:t>Fourth level</a:t>
             </a:r>
+            <a:endParaRPr lang="en-US"/>
           </a:p>
           <a:p>
             <a:pPr lvl="4"/>
@@ -890,6 +897,7 @@
               <a:rPr lang="en-US"/>
               <a:t>Fifth level</a:t>
             </a:r>
+            <a:endParaRPr lang="en-US"/>
           </a:p>
         </p:txBody>
       </p:sp>
@@ -910,7 +918,6 @@
           <a:p>
             <a:fld id="{5BCAD085-E8A6-8845-BD4E-CB4CCA059FC4}" type="datetimeFigureOut">
               <a:rPr lang="en-US" smtClean="0"/>
-              <a:t>3/13/2026</a:t>
             </a:fld>
             <a:endParaRPr lang="en-US"/>
           </a:p>
@@ -952,7 +959,6 @@
           <a:p>
             <a:fld id="{C1FF6DA9-008F-8B48-92A6-B652298478BF}" type="slidenum">
               <a:rPr lang="en-US" smtClean="0"/>
-              <a:t>‹#›</a:t>
             </a:fld>
             <a:endParaRPr lang="en-US"/>
           </a:p>
@@ -1007,6 +1013,7 @@
               <a:rPr lang="en-US"/>
               <a:t>Click to edit Master title style</a:t>
             </a:r>
+            <a:endParaRPr lang="en-US"/>
           </a:p>
         </p:txBody>
       </p:sp>
@@ -1035,6 +1042,7 @@
               <a:rPr lang="en-US"/>
               <a:t>Click to edit Master text styles</a:t>
             </a:r>
+            <a:endParaRPr lang="en-US"/>
           </a:p>
           <a:p>
             <a:pPr lvl="1"/>
@@ -1042,6 +1050,7 @@
               <a:rPr lang="en-US"/>
               <a:t>Second level</a:t>
             </a:r>
+            <a:endParaRPr lang="en-US"/>
           </a:p>
           <a:p>
             <a:pPr lvl="2"/>
@@ -1049,6 +1058,7 @@
               <a:rPr lang="en-US"/>
               <a:t>Third level</a:t>
             </a:r>
+            <a:endParaRPr lang="en-US"/>
           </a:p>
           <a:p>
             <a:pPr lvl="3"/>
@@ -1056,6 +1066,7 @@
               <a:rPr lang="en-US"/>
               <a:t>Fourth level</a:t>
             </a:r>
+            <a:endParaRPr lang="en-US"/>
           </a:p>
           <a:p>
             <a:pPr lvl="4"/>
@@ -1063,6 +1074,7 @@
               <a:rPr lang="en-US"/>
               <a:t>Fifth level</a:t>
             </a:r>
+            <a:endParaRPr lang="en-US"/>
           </a:p>
         </p:txBody>
       </p:sp>
@@ -1083,7 +1095,6 @@
           <a:p>
             <a:fld id="{5BCAD085-E8A6-8845-BD4E-CB4CCA059FC4}" type="datetimeFigureOut">
               <a:rPr lang="en-US" smtClean="0"/>
-              <a:t>3/13/2026</a:t>
             </a:fld>
             <a:endParaRPr lang="en-US"/>
           </a:p>
@@ -1125,7 +1136,6 @@
           <a:p>
             <a:fld id="{C1FF6DA9-008F-8B48-92A6-B652298478BF}" type="slidenum">
               <a:rPr lang="en-US" smtClean="0"/>
-              <a:t>‹#›</a:t>
             </a:fld>
             <a:endParaRPr lang="en-US"/>
           </a:p>
@@ -1175,6 +1185,7 @@
               <a:rPr lang="en-US"/>
               <a:t>Click to edit Master title style</a:t>
             </a:r>
+            <a:endParaRPr lang="en-US"/>
           </a:p>
         </p:txBody>
       </p:sp>
@@ -1198,6 +1209,7 @@
               <a:rPr lang="en-US"/>
               <a:t>Click to edit Master text styles</a:t>
             </a:r>
+            <a:endParaRPr lang="en-US"/>
           </a:p>
           <a:p>
             <a:pPr lvl="1"/>
@@ -1205,6 +1217,7 @@
               <a:rPr lang="en-US"/>
               <a:t>Second level</a:t>
             </a:r>
+            <a:endParaRPr lang="en-US"/>
           </a:p>
           <a:p>
             <a:pPr lvl="2"/>
@@ -1212,6 +1225,7 @@
               <a:rPr lang="en-US"/>
               <a:t>Third level</a:t>
             </a:r>
+            <a:endParaRPr lang="en-US"/>
           </a:p>
           <a:p>
             <a:pPr lvl="3"/>
@@ -1219,6 +1233,7 @@
               <a:rPr lang="en-US"/>
               <a:t>Fourth level</a:t>
             </a:r>
+            <a:endParaRPr lang="en-US"/>
           </a:p>
           <a:p>
             <a:pPr lvl="4"/>
@@ -1226,6 +1241,7 @@
               <a:rPr lang="en-US"/>
               <a:t>Fifth level</a:t>
             </a:r>
+            <a:endParaRPr lang="en-US"/>
           </a:p>
         </p:txBody>
       </p:sp>
@@ -1246,7 +1262,6 @@
           <a:p>
             <a:fld id="{5BCAD085-E8A6-8845-BD4E-CB4CCA059FC4}" type="datetimeFigureOut">
               <a:rPr lang="en-US" smtClean="0"/>
-              <a:t>3/13/2026</a:t>
             </a:fld>
             <a:endParaRPr lang="en-US"/>
           </a:p>
@@ -1288,7 +1303,6 @@
           <a:p>
             <a:fld id="{C1FF6DA9-008F-8B48-92A6-B652298478BF}" type="slidenum">
               <a:rPr lang="en-US" smtClean="0"/>
-              <a:t>‹#›</a:t>
             </a:fld>
             <a:endParaRPr lang="en-US"/>
           </a:p>
@@ -1347,6 +1361,7 @@
               <a:rPr lang="en-US"/>
               <a:t>Click to edit Master title style</a:t>
             </a:r>
+            <a:endParaRPr lang="en-US"/>
           </a:p>
         </p:txBody>
       </p:sp>
@@ -1466,6 +1481,7 @@
               <a:rPr lang="en-US"/>
               <a:t>Click to edit Master text styles</a:t>
             </a:r>
+            <a:endParaRPr lang="en-US"/>
           </a:p>
         </p:txBody>
       </p:sp>
@@ -1486,7 +1502,6 @@
           <a:p>
             <a:fld id="{5BCAD085-E8A6-8845-BD4E-CB4CCA059FC4}" type="datetimeFigureOut">
               <a:rPr lang="en-US" smtClean="0"/>
-              <a:t>3/13/2026</a:t>
             </a:fld>
             <a:endParaRPr lang="en-US"/>
           </a:p>
@@ -1528,7 +1543,6 @@
           <a:p>
             <a:fld id="{C1FF6DA9-008F-8B48-92A6-B652298478BF}" type="slidenum">
               <a:rPr lang="en-US" smtClean="0"/>
-              <a:t>‹#›</a:t>
             </a:fld>
             <a:endParaRPr lang="en-US"/>
           </a:p>
@@ -1578,6 +1592,7 @@
               <a:rPr lang="en-US"/>
               <a:t>Click to edit Master title style</a:t>
             </a:r>
+            <a:endParaRPr lang="en-US"/>
           </a:p>
         </p:txBody>
       </p:sp>
@@ -1634,6 +1649,7 @@
               <a:rPr lang="en-US"/>
               <a:t>Click to edit Master text styles</a:t>
             </a:r>
+            <a:endParaRPr lang="en-US"/>
           </a:p>
           <a:p>
             <a:pPr lvl="1"/>
@@ -1641,6 +1657,7 @@
               <a:rPr lang="en-US"/>
               <a:t>Second level</a:t>
             </a:r>
+            <a:endParaRPr lang="en-US"/>
           </a:p>
           <a:p>
             <a:pPr lvl="2"/>
@@ -1648,6 +1665,7 @@
               <a:rPr lang="en-US"/>
               <a:t>Third level</a:t>
             </a:r>
+            <a:endParaRPr lang="en-US"/>
           </a:p>
           <a:p>
             <a:pPr lvl="3"/>
@@ -1655,6 +1673,7 @@
               <a:rPr lang="en-US"/>
               <a:t>Fourth level</a:t>
             </a:r>
+            <a:endParaRPr lang="en-US"/>
           </a:p>
           <a:p>
             <a:pPr lvl="4"/>
@@ -1662,6 +1681,7 @@
               <a:rPr lang="en-US"/>
               <a:t>Fifth level</a:t>
             </a:r>
+            <a:endParaRPr lang="en-US"/>
           </a:p>
         </p:txBody>
       </p:sp>
@@ -1718,6 +1738,7 @@
               <a:rPr lang="en-US"/>
               <a:t>Click to edit Master text styles</a:t>
             </a:r>
+            <a:endParaRPr lang="en-US"/>
           </a:p>
           <a:p>
             <a:pPr lvl="1"/>
@@ -1725,6 +1746,7 @@
               <a:rPr lang="en-US"/>
               <a:t>Second level</a:t>
             </a:r>
+            <a:endParaRPr lang="en-US"/>
           </a:p>
           <a:p>
             <a:pPr lvl="2"/>
@@ -1732,6 +1754,7 @@
               <a:rPr lang="en-US"/>
               <a:t>Third level</a:t>
             </a:r>
+            <a:endParaRPr lang="en-US"/>
           </a:p>
           <a:p>
             <a:pPr lvl="3"/>
@@ -1739,6 +1762,7 @@
               <a:rPr lang="en-US"/>
               <a:t>Fourth level</a:t>
             </a:r>
+            <a:endParaRPr lang="en-US"/>
           </a:p>
           <a:p>
             <a:pPr lvl="4"/>
@@ -1746,6 +1770,7 @@
               <a:rPr lang="en-US"/>
               <a:t>Fifth level</a:t>
             </a:r>
+            <a:endParaRPr lang="en-US"/>
           </a:p>
         </p:txBody>
       </p:sp>
@@ -1766,7 +1791,6 @@
           <a:p>
             <a:fld id="{5BCAD085-E8A6-8845-BD4E-CB4CCA059FC4}" type="datetimeFigureOut">
               <a:rPr lang="en-US" smtClean="0"/>
-              <a:t>3/13/2026</a:t>
             </a:fld>
             <a:endParaRPr lang="en-US"/>
           </a:p>
@@ -1808,7 +1832,6 @@
           <a:p>
             <a:fld id="{C1FF6DA9-008F-8B48-92A6-B652298478BF}" type="slidenum">
               <a:rPr lang="en-US" smtClean="0"/>
-              <a:t>‹#›</a:t>
             </a:fld>
             <a:endParaRPr lang="en-US"/>
           </a:p>
@@ -1862,6 +1885,7 @@
               <a:rPr lang="en-US"/>
               <a:t>Click to edit Master title style</a:t>
             </a:r>
+            <a:endParaRPr lang="en-US"/>
           </a:p>
         </p:txBody>
       </p:sp>
@@ -1927,6 +1951,7 @@
               <a:rPr lang="en-US"/>
               <a:t>Click to edit Master text styles</a:t>
             </a:r>
+            <a:endParaRPr lang="en-US"/>
           </a:p>
         </p:txBody>
       </p:sp>
@@ -1983,6 +2008,7 @@
               <a:rPr lang="en-US"/>
               <a:t>Click to edit Master text styles</a:t>
             </a:r>
+            <a:endParaRPr lang="en-US"/>
           </a:p>
           <a:p>
             <a:pPr lvl="1"/>
@@ -1990,6 +2016,7 @@
               <a:rPr lang="en-US"/>
               <a:t>Second level</a:t>
             </a:r>
+            <a:endParaRPr lang="en-US"/>
           </a:p>
           <a:p>
             <a:pPr lvl="2"/>
@@ -1997,6 +2024,7 @@
               <a:rPr lang="en-US"/>
               <a:t>Third level</a:t>
             </a:r>
+            <a:endParaRPr lang="en-US"/>
           </a:p>
           <a:p>
             <a:pPr lvl="3"/>
@@ -2004,6 +2032,7 @@
               <a:rPr lang="en-US"/>
               <a:t>Fourth level</a:t>
             </a:r>
+            <a:endParaRPr lang="en-US"/>
           </a:p>
           <a:p>
             <a:pPr lvl="4"/>
@@ -2011,6 +2040,7 @@
               <a:rPr lang="en-US"/>
               <a:t>Fifth level</a:t>
             </a:r>
+            <a:endParaRPr lang="en-US"/>
           </a:p>
         </p:txBody>
       </p:sp>
@@ -2076,6 +2106,7 @@
               <a:rPr lang="en-US"/>
               <a:t>Click to edit Master text styles</a:t>
             </a:r>
+            <a:endParaRPr lang="en-US"/>
           </a:p>
         </p:txBody>
       </p:sp>
@@ -2132,6 +2163,7 @@
               <a:rPr lang="en-US"/>
               <a:t>Click to edit Master text styles</a:t>
             </a:r>
+            <a:endParaRPr lang="en-US"/>
           </a:p>
           <a:p>
             <a:pPr lvl="1"/>
@@ -2139,6 +2171,7 @@
               <a:rPr lang="en-US"/>
               <a:t>Second level</a:t>
             </a:r>
+            <a:endParaRPr lang="en-US"/>
           </a:p>
           <a:p>
             <a:pPr lvl="2"/>
@@ -2146,6 +2179,7 @@
               <a:rPr lang="en-US"/>
               <a:t>Third level</a:t>
             </a:r>
+            <a:endParaRPr lang="en-US"/>
           </a:p>
           <a:p>
             <a:pPr lvl="3"/>
@@ -2153,6 +2187,7 @@
               <a:rPr lang="en-US"/>
               <a:t>Fourth level</a:t>
             </a:r>
+            <a:endParaRPr lang="en-US"/>
           </a:p>
           <a:p>
             <a:pPr lvl="4"/>
@@ -2160,6 +2195,7 @@
               <a:rPr lang="en-US"/>
               <a:t>Fifth level</a:t>
             </a:r>
+            <a:endParaRPr lang="en-US"/>
           </a:p>
         </p:txBody>
       </p:sp>
@@ -2180,7 +2216,6 @@
           <a:p>
             <a:fld id="{5BCAD085-E8A6-8845-BD4E-CB4CCA059FC4}" type="datetimeFigureOut">
               <a:rPr lang="en-US" smtClean="0"/>
-              <a:t>3/13/2026</a:t>
             </a:fld>
             <a:endParaRPr lang="en-US"/>
           </a:p>
@@ -2222,7 +2257,6 @@
           <a:p>
             <a:fld id="{C1FF6DA9-008F-8B48-92A6-B652298478BF}" type="slidenum">
               <a:rPr lang="en-US" smtClean="0"/>
-              <a:t>‹#›</a:t>
             </a:fld>
             <a:endParaRPr lang="en-US"/>
           </a:p>
@@ -2272,6 +2306,7 @@
               <a:rPr lang="en-US"/>
               <a:t>Click to edit Master title style</a:t>
             </a:r>
+            <a:endParaRPr lang="en-US"/>
           </a:p>
         </p:txBody>
       </p:sp>
@@ -2292,7 +2327,6 @@
           <a:p>
             <a:fld id="{5BCAD085-E8A6-8845-BD4E-CB4CCA059FC4}" type="datetimeFigureOut">
               <a:rPr lang="en-US" smtClean="0"/>
-              <a:t>3/13/2026</a:t>
             </a:fld>
             <a:endParaRPr lang="en-US"/>
           </a:p>
@@ -2334,7 +2368,6 @@
           <a:p>
             <a:fld id="{C1FF6DA9-008F-8B48-92A6-B652298478BF}" type="slidenum">
               <a:rPr lang="en-US" smtClean="0"/>
-              <a:t>‹#›</a:t>
             </a:fld>
             <a:endParaRPr lang="en-US"/>
           </a:p>
@@ -2382,7 +2415,6 @@
           <a:p>
             <a:fld id="{5BCAD085-E8A6-8845-BD4E-CB4CCA059FC4}" type="datetimeFigureOut">
               <a:rPr lang="en-US" smtClean="0"/>
-              <a:t>3/13/2026</a:t>
             </a:fld>
             <a:endParaRPr lang="en-US"/>
           </a:p>
@@ -2424,7 +2456,6 @@
           <a:p>
             <a:fld id="{C1FF6DA9-008F-8B48-92A6-B652298478BF}" type="slidenum">
               <a:rPr lang="en-US" smtClean="0"/>
-              <a:t>‹#›</a:t>
             </a:fld>
             <a:endParaRPr lang="en-US"/>
           </a:p>
@@ -2483,6 +2514,7 @@
               <a:rPr lang="en-US"/>
               <a:t>Click to edit Master title style</a:t>
             </a:r>
+            <a:endParaRPr lang="en-US"/>
           </a:p>
         </p:txBody>
       </p:sp>
@@ -2539,6 +2571,7 @@
               <a:rPr lang="en-US"/>
               <a:t>Click to edit Master text styles</a:t>
             </a:r>
+            <a:endParaRPr lang="en-US"/>
           </a:p>
           <a:p>
             <a:pPr lvl="1"/>
@@ -2546,6 +2579,7 @@
               <a:rPr lang="en-US"/>
               <a:t>Second level</a:t>
             </a:r>
+            <a:endParaRPr lang="en-US"/>
           </a:p>
           <a:p>
             <a:pPr lvl="2"/>
@@ -2553,6 +2587,7 @@
               <a:rPr lang="en-US"/>
               <a:t>Third level</a:t>
             </a:r>
+            <a:endParaRPr lang="en-US"/>
           </a:p>
           <a:p>
             <a:pPr lvl="3"/>
@@ -2560,6 +2595,7 @@
               <a:rPr lang="en-US"/>
               <a:t>Fourth level</a:t>
             </a:r>
+            <a:endParaRPr lang="en-US"/>
           </a:p>
           <a:p>
             <a:pPr lvl="4"/>
@@ -2567,6 +2603,7 @@
               <a:rPr lang="en-US"/>
               <a:t>Fifth level</a:t>
             </a:r>
+            <a:endParaRPr lang="en-US"/>
           </a:p>
         </p:txBody>
       </p:sp>
@@ -2632,6 +2669,7 @@
               <a:rPr lang="en-US"/>
               <a:t>Click to edit Master text styles</a:t>
             </a:r>
+            <a:endParaRPr lang="en-US"/>
           </a:p>
         </p:txBody>
       </p:sp>
@@ -2652,7 +2690,6 @@
           <a:p>
             <a:fld id="{5BCAD085-E8A6-8845-BD4E-CB4CCA059FC4}" type="datetimeFigureOut">
               <a:rPr lang="en-US" smtClean="0"/>
-              <a:t>3/13/2026</a:t>
             </a:fld>
             <a:endParaRPr lang="en-US"/>
           </a:p>
@@ -2694,7 +2731,6 @@
           <a:p>
             <a:fld id="{C1FF6DA9-008F-8B48-92A6-B652298478BF}" type="slidenum">
               <a:rPr lang="en-US" smtClean="0"/>
-              <a:t>‹#›</a:t>
             </a:fld>
             <a:endParaRPr lang="en-US"/>
           </a:p>
@@ -2753,6 +2789,7 @@
               <a:rPr lang="en-US"/>
               <a:t>Click to edit Master title style</a:t>
             </a:r>
+            <a:endParaRPr lang="en-US"/>
           </a:p>
         </p:txBody>
       </p:sp>
@@ -2879,6 +2916,7 @@
               <a:rPr lang="en-US"/>
               <a:t>Click to edit Master text styles</a:t>
             </a:r>
+            <a:endParaRPr lang="en-US"/>
           </a:p>
         </p:txBody>
       </p:sp>
@@ -2899,7 +2937,6 @@
           <a:p>
             <a:fld id="{5BCAD085-E8A6-8845-BD4E-CB4CCA059FC4}" type="datetimeFigureOut">
               <a:rPr lang="en-US" smtClean="0"/>
-              <a:t>3/13/2026</a:t>
             </a:fld>
             <a:endParaRPr lang="en-US"/>
           </a:p>
@@ -2941,7 +2978,6 @@
           <a:p>
             <a:fld id="{C1FF6DA9-008F-8B48-92A6-B652298478BF}" type="slidenum">
               <a:rPr lang="en-US" smtClean="0"/>
-              <a:t>‹#›</a:t>
             </a:fld>
             <a:endParaRPr lang="en-US"/>
           </a:p>
@@ -3006,6 +3042,7 @@
               <a:rPr lang="en-US"/>
               <a:t>Click to edit Master title style</a:t>
             </a:r>
+            <a:endParaRPr lang="en-US"/>
           </a:p>
         </p:txBody>
       </p:sp>
@@ -3039,6 +3076,7 @@
               <a:rPr lang="en-US"/>
               <a:t>Click to edit Master text styles</a:t>
             </a:r>
+            <a:endParaRPr lang="en-US"/>
           </a:p>
           <a:p>
             <a:pPr lvl="1"/>
@@ -3046,6 +3084,7 @@
               <a:rPr lang="en-US"/>
               <a:t>Second level</a:t>
             </a:r>
+            <a:endParaRPr lang="en-US"/>
           </a:p>
           <a:p>
             <a:pPr lvl="2"/>
@@ -3053,6 +3092,7 @@
               <a:rPr lang="en-US"/>
               <a:t>Third level</a:t>
             </a:r>
+            <a:endParaRPr lang="en-US"/>
           </a:p>
           <a:p>
             <a:pPr lvl="3"/>
@@ -3060,6 +3100,7 @@
               <a:rPr lang="en-US"/>
               <a:t>Fourth level</a:t>
             </a:r>
+            <a:endParaRPr lang="en-US"/>
           </a:p>
           <a:p>
             <a:pPr lvl="4"/>
@@ -3067,6 +3108,7 @@
               <a:rPr lang="en-US"/>
               <a:t>Fifth level</a:t>
             </a:r>
+            <a:endParaRPr lang="en-US"/>
           </a:p>
         </p:txBody>
       </p:sp>
@@ -3105,7 +3147,6 @@
           <a:p>
             <a:fld id="{5BCAD085-E8A6-8845-BD4E-CB4CCA059FC4}" type="datetimeFigureOut">
               <a:rPr lang="en-US" smtClean="0"/>
-              <a:t>3/13/2026</a:t>
             </a:fld>
             <a:endParaRPr lang="en-US"/>
           </a:p>
@@ -3183,7 +3224,6 @@
           <a:p>
             <a:fld id="{C1FF6DA9-008F-8B48-92A6-B652298478BF}" type="slidenum">
               <a:rPr lang="en-US" smtClean="0"/>
-              <a:t>‹#›</a:t>
             </a:fld>
             <a:endParaRPr lang="en-US"/>
           </a:p>
@@ -3510,18 +3550,18 @@
             </a:pPr>
             <a:r>
               <a:rPr lang="en-US" altLang="zh-CN" sz="5400" spc="-10" dirty="0">
-                <a:cs typeface="Calibri"/>
+                <a:cs typeface="Calibri" panose="020F0502020204030204"/>
               </a:rPr>
               <a:t>Transport Layer OAM </a:t>
             </a:r>
             <a:r>
               <a:rPr lang="en-US" altLang="zh-CN" sz="5400" spc="-10">
-                <a:cs typeface="Calibri"/>
+                <a:cs typeface="Calibri" panose="020F0502020204030204"/>
               </a:rPr>
               <a:t>Protocol Considerations</a:t>
             </a:r>
             <a:endParaRPr lang="en-US" altLang="zh-CN" sz="5400" spc="-10" dirty="0">
-              <a:cs typeface="Calibri"/>
+              <a:cs typeface="Calibri" panose="020F0502020204030204"/>
             </a:endParaRPr>
           </a:p>
         </p:txBody>
@@ -3564,6 +3604,14 @@
               </a:rPr>
               <a:t>Feng Yang (China Mobile)</a:t>
             </a:r>
+            <a:endParaRPr lang="en-US" altLang="zh-CN" sz="2400" dirty="0">
+              <a:solidFill>
+                <a:schemeClr val="tx1"/>
+              </a:solidFill>
+              <a:latin typeface="Arial" panose="020B0604020202020204" pitchFamily="34" charset="0"/>
+              <a:cs typeface="Arial" panose="020B0604020202020204" pitchFamily="34" charset="0"/>
+              <a:sym typeface="+mn-ea"/>
+            </a:endParaRPr>
           </a:p>
         </p:txBody>
       </p:sp>
@@ -3632,13 +3680,7 @@
       </p:grpSpPr>
       <p:sp>
         <p:nvSpPr>
-          <p:cNvPr id="2" name="TextBox 5">
-            <a:extLst>
-              <a:ext uri="{FF2B5EF4-FFF2-40B4-BE49-F238E27FC236}">
-                <a16:creationId xmlns:a16="http://schemas.microsoft.com/office/drawing/2014/main" id="{07AD41F5-9DA7-B4A8-4C59-9D311462BC07}"/>
-              </a:ext>
-            </a:extLst>
-          </p:cNvPr>
+          <p:cNvPr id="2" name="TextBox 5"/>
           <p:cNvSpPr txBox="1"/>
           <p:nvPr/>
         </p:nvSpPr>
@@ -3689,20 +3731,14 @@
       </p:sp>
       <p:sp>
         <p:nvSpPr>
-          <p:cNvPr id="4" name="文本框 3">
-            <a:extLst>
-              <a:ext uri="{FF2B5EF4-FFF2-40B4-BE49-F238E27FC236}">
-                <a16:creationId xmlns:a16="http://schemas.microsoft.com/office/drawing/2014/main" id="{59A66A0F-55E1-4D5A-F9AA-B428F24B77F6}"/>
-              </a:ext>
-            </a:extLst>
-          </p:cNvPr>
+          <p:cNvPr id="4" name="文本框 3"/>
           <p:cNvSpPr txBox="1"/>
           <p:nvPr/>
         </p:nvSpPr>
         <p:spPr>
           <a:xfrm>
             <a:off x="780288" y="1840126"/>
-            <a:ext cx="10389140" cy="3820726"/>
+            <a:ext cx="10389140" cy="3876675"/>
           </a:xfrm>
           <a:prstGeom prst="rect">
             <a:avLst/>
@@ -3724,6 +3760,7 @@
               <a:rPr lang="en-US" altLang="zh-CN" sz="2400" b="1" dirty="0"/>
               <a:t>LEO satellite transport:</a:t>
             </a:r>
+            <a:endParaRPr lang="en-US" altLang="zh-CN" sz="2400" b="1" dirty="0"/>
           </a:p>
           <a:p>
             <a:pPr marL="342900" indent="-342900">
@@ -3737,6 +3774,7 @@
               <a:rPr lang="en-US" altLang="zh-CN" sz="2400" dirty="0"/>
               <a:t>Non-congestive latency variation and loss </a:t>
             </a:r>
+            <a:endParaRPr lang="en-US" altLang="zh-CN" sz="2400" dirty="0"/>
           </a:p>
           <a:p>
             <a:pPr marL="342900" indent="-342900">
@@ -3748,8 +3786,9 @@
             </a:pPr>
             <a:r>
               <a:rPr lang="en-US" altLang="zh-CN" sz="2400" dirty="0"/>
-              <a:t>Time‑varying capacity</a:t>
-            </a:r>
+              <a:t>Time-varying capacity</a:t>
+            </a:r>
+            <a:endParaRPr lang="en-US" altLang="zh-CN" sz="2400" dirty="0"/>
           </a:p>
           <a:p>
             <a:pPr marL="342900" indent="-342900">
@@ -3763,6 +3802,7 @@
               <a:rPr lang="en-US" altLang="zh-CN" sz="2400" dirty="0"/>
               <a:t>Frequent route/beam handover</a:t>
             </a:r>
+            <a:endParaRPr lang="en-US" altLang="zh-CN" sz="2400" dirty="0"/>
           </a:p>
           <a:p>
             <a:pPr>
@@ -3786,6 +3826,7 @@
               <a:rPr lang="en-US" altLang="zh-CN" sz="2400" b="1" baseline="30000" dirty="0"/>
               <a:t>[1]</a:t>
             </a:r>
+            <a:endParaRPr lang="en-US" altLang="zh-CN" sz="2400" b="1" baseline="30000" dirty="0"/>
           </a:p>
           <a:p>
             <a:pPr marL="342900" indent="-342900">
@@ -3815,6 +3856,7 @@
               <a:rPr lang="en-US" altLang="zh-CN" sz="2400" dirty="0"/>
               <a:t> for uploads</a:t>
             </a:r>
+            <a:endParaRPr lang="en-US" altLang="zh-CN" sz="2400" dirty="0"/>
           </a:p>
           <a:p>
             <a:pPr marL="342900" indent="-342900">
@@ -3856,25 +3898,20 @@
               <a:rPr lang="en-US" altLang="zh-CN" sz="2400" b="1" dirty="0"/>
               <a:t>20ms</a:t>
             </a:r>
-          </a:p>
-        </p:txBody>
-      </p:sp>
-      <p:sp>
-        <p:nvSpPr>
-          <p:cNvPr id="5" name="文本框 4">
-            <a:extLst>
-              <a:ext uri="{FF2B5EF4-FFF2-40B4-BE49-F238E27FC236}">
-                <a16:creationId xmlns:a16="http://schemas.microsoft.com/office/drawing/2014/main" id="{9D7C9414-7771-9441-FB80-6774A9DDFD6D}"/>
-              </a:ext>
-            </a:extLst>
-          </p:cNvPr>
+            <a:endParaRPr lang="en-US" altLang="zh-CN" sz="2400" b="1" dirty="0"/>
+          </a:p>
+        </p:txBody>
+      </p:sp>
+      <p:sp>
+        <p:nvSpPr>
+          <p:cNvPr id="5" name="文本框 4"/>
           <p:cNvSpPr txBox="1"/>
           <p:nvPr/>
         </p:nvSpPr>
         <p:spPr>
           <a:xfrm>
             <a:off x="654184" y="6193410"/>
-            <a:ext cx="11116283" cy="584775"/>
+            <a:ext cx="11116283" cy="583565"/>
           </a:xfrm>
           <a:prstGeom prst="rect">
             <a:avLst/>
@@ -3888,42 +3925,39 @@
           <a:lstStyle/>
           <a:p>
             <a:r>
-              <a:rPr lang="en-US" altLang="zh-CN" sz="1600" dirty="0">
+              <a:rPr lang="en-US" altLang="zh-CN" sz="1600" i="1" dirty="0">
                 <a:solidFill>
                   <a:srgbClr val="0E0E0E"/>
                 </a:solidFill>
-                <a:latin typeface="??"/>
+                <a:cs typeface="+mn-lt"/>
               </a:rPr>
               <a:t>[1]MICHEL F, TREVISAN M, GIORDANO D, 2022. A first look at </a:t>
             </a:r>
             <a:r>
-              <a:rPr lang="en-US" altLang="zh-CN" sz="1600" dirty="0" err="1">
+              <a:rPr lang="en-US" altLang="zh-CN" sz="1600" i="1" dirty="0" err="1">
                 <a:solidFill>
                   <a:srgbClr val="0E0E0E"/>
                 </a:solidFill>
-                <a:latin typeface="??"/>
+                <a:cs typeface="+mn-lt"/>
               </a:rPr>
               <a:t>starlink</a:t>
             </a:r>
             <a:r>
-              <a:rPr lang="en-US" altLang="zh-CN" sz="1600" dirty="0">
+              <a:rPr lang="en-US" altLang="zh-CN" sz="1600" i="1" dirty="0">
                 <a:solidFill>
                   <a:srgbClr val="0E0E0E"/>
                 </a:solidFill>
-                <a:latin typeface="??"/>
+                <a:cs typeface="+mn-lt"/>
               </a:rPr>
               <a:t> performance. Proceedings of the 22nd ACM Internet Measurement Conference. ACM: 130-136.</a:t>
             </a:r>
-            <a:endParaRPr lang="zh-CN" altLang="en-US" sz="1600" dirty="0"/>
+            <a:endParaRPr lang="zh-CN" altLang="en-US" sz="1600" i="1" dirty="0">
+              <a:cs typeface="+mn-lt"/>
+            </a:endParaRPr>
           </a:p>
         </p:txBody>
       </p:sp>
     </p:spTree>
-    <p:extLst>
-      <p:ext uri="{BB962C8B-B14F-4D97-AF65-F5344CB8AC3E}">
-        <p14:creationId xmlns:p14="http://schemas.microsoft.com/office/powerpoint/2010/main" val="3426415148"/>
-      </p:ext>
-    </p:extLst>
   </p:cSld>
   <p:clrMapOvr>
     <a:masterClrMapping/>
@@ -3950,20 +3984,14 @@
       </p:grpSpPr>
       <p:sp>
         <p:nvSpPr>
-          <p:cNvPr id="3" name="文本框 2">
-            <a:extLst>
-              <a:ext uri="{FF2B5EF4-FFF2-40B4-BE49-F238E27FC236}">
-                <a16:creationId xmlns:a16="http://schemas.microsoft.com/office/drawing/2014/main" id="{94810911-4786-BAED-DA84-B4F518C6418B}"/>
-              </a:ext>
-            </a:extLst>
-          </p:cNvPr>
+          <p:cNvPr id="3" name="文本框 2"/>
           <p:cNvSpPr txBox="1"/>
           <p:nvPr/>
         </p:nvSpPr>
         <p:spPr>
           <a:xfrm>
             <a:off x="768486" y="1793791"/>
-            <a:ext cx="9377464" cy="3339376"/>
+            <a:ext cx="9377464" cy="4107815"/>
           </a:xfrm>
           <a:prstGeom prst="rect">
             <a:avLst/>
@@ -3988,7 +4016,7 @@
                 <a:solidFill>
                   <a:srgbClr val="18181B"/>
                 </a:solidFill>
-                <a:latin typeface="CircularXXWeb"/>
+                <a:cs typeface="+mn-lt"/>
               </a:rPr>
               <a:t>TCP variations</a:t>
             </a:r>
@@ -3997,7 +4025,7 @@
                 <a:solidFill>
                   <a:srgbClr val="18181B"/>
                 </a:solidFill>
-                <a:latin typeface="CircularXXWeb"/>
+                <a:cs typeface="+mn-lt"/>
               </a:rPr>
               <a:t>: </a:t>
             </a:r>
@@ -4006,7 +4034,7 @@
                 <a:solidFill>
                   <a:srgbClr val="18181B"/>
                 </a:solidFill>
-                <a:latin typeface="CircularXXWeb"/>
+                <a:cs typeface="+mn-lt"/>
               </a:rPr>
               <a:t>Hybla</a:t>
             </a:r>
@@ -4015,10 +4043,16 @@
                 <a:solidFill>
                   <a:srgbClr val="18181B"/>
                 </a:solidFill>
-                <a:latin typeface="CircularXXWeb"/>
+                <a:cs typeface="+mn-lt"/>
               </a:rPr>
               <a:t>/CUBIC/BBR, etc.</a:t>
             </a:r>
+            <a:endParaRPr lang="en-US" altLang="zh-CN" sz="2000" dirty="0">
+              <a:solidFill>
+                <a:srgbClr val="18181B"/>
+              </a:solidFill>
+              <a:cs typeface="+mn-lt"/>
+            </a:endParaRPr>
           </a:p>
           <a:p>
             <a:pPr marL="742950" lvl="1" indent="-285750">
@@ -4033,10 +4067,16 @@
                 <a:solidFill>
                   <a:srgbClr val="18181B"/>
                 </a:solidFill>
-                <a:latin typeface="CircularXXWeb"/>
+                <a:cs typeface="+mn-lt"/>
               </a:rPr>
               <a:t>Bottleneck probe based on loss/delay/bandwidth</a:t>
             </a:r>
+            <a:endParaRPr lang="en-US" altLang="zh-CN" sz="2000" dirty="0">
+              <a:solidFill>
+                <a:srgbClr val="18181B"/>
+              </a:solidFill>
+              <a:cs typeface="+mn-lt"/>
+            </a:endParaRPr>
           </a:p>
           <a:p>
             <a:pPr marL="285750" indent="-285750" algn="l">
@@ -4051,7 +4091,7 @@
                 <a:solidFill>
                   <a:srgbClr val="18181B"/>
                 </a:solidFill>
-                <a:latin typeface="CircularXXWeb"/>
+                <a:cs typeface="+mn-lt"/>
               </a:rPr>
               <a:t>PEP / split connections</a:t>
             </a:r>
@@ -4061,10 +4101,17 @@
                   <a:srgbClr val="18181B"/>
                 </a:solidFill>
                 <a:effectLst/>
-                <a:latin typeface="CircularXXWeb"/>
+                <a:cs typeface="+mn-lt"/>
               </a:rPr>
               <a:t>:</a:t>
             </a:r>
+            <a:endParaRPr lang="en-US" altLang="zh-CN" sz="2000" b="0" i="0" dirty="0">
+              <a:solidFill>
+                <a:srgbClr val="18181B"/>
+              </a:solidFill>
+              <a:effectLst/>
+              <a:cs typeface="+mn-lt"/>
+            </a:endParaRPr>
           </a:p>
           <a:p>
             <a:pPr marL="742950" lvl="1" indent="-285750">
@@ -4075,7 +4122,9 @@
               <a:buChar char="•"/>
             </a:pPr>
             <a:r>
-              <a:rPr lang="en-US" altLang="zh-CN" sz="2000" dirty="0"/>
+              <a:rPr lang="en-US" altLang="zh-CN" sz="2000" dirty="0">
+                <a:cs typeface="+mn-lt"/>
+              </a:rPr>
               <a:t>Splits TCP at satellite edges to hide long RTT</a:t>
             </a:r>
             <a:endParaRPr lang="en-US" altLang="zh-CN" sz="2000" b="0" i="0" dirty="0">
@@ -4083,7 +4132,7 @@
                 <a:srgbClr val="18181B"/>
               </a:solidFill>
               <a:effectLst/>
-              <a:latin typeface="CircularXXWeb"/>
+              <a:cs typeface="+mn-lt"/>
             </a:endParaRPr>
           </a:p>
           <a:p>
@@ -4099,7 +4148,7 @@
                 <a:solidFill>
                   <a:srgbClr val="18181B"/>
                 </a:solidFill>
-                <a:latin typeface="CircularXXWeb"/>
+                <a:cs typeface="+mn-lt"/>
               </a:rPr>
               <a:t>Explicit signal</a:t>
             </a:r>
@@ -4109,10 +4158,17 @@
                   <a:srgbClr val="18181B"/>
                 </a:solidFill>
                 <a:effectLst/>
-                <a:latin typeface="CircularXXWeb"/>
+                <a:cs typeface="+mn-lt"/>
               </a:rPr>
               <a:t>: </a:t>
             </a:r>
+            <a:endParaRPr lang="en-US" altLang="zh-CN" sz="2000" b="0" i="0" dirty="0">
+              <a:solidFill>
+                <a:srgbClr val="18181B"/>
+              </a:solidFill>
+              <a:effectLst/>
+              <a:cs typeface="+mn-lt"/>
+            </a:endParaRPr>
           </a:p>
           <a:p>
             <a:pPr marL="742950" lvl="1" indent="-285750">
@@ -4123,15 +4179,17 @@
               <a:buChar char="•"/>
             </a:pPr>
             <a:r>
-              <a:rPr lang="en-US" altLang="zh-CN" sz="2000" dirty="0"/>
-              <a:t>link‑layer/physical info (fade, resource allocation, handover schedule) notification</a:t>
+              <a:rPr lang="en-US" altLang="zh-CN" sz="2000" dirty="0">
+                <a:cs typeface="+mn-lt"/>
+              </a:rPr>
+              <a:t>Link-layer/physical info (fade, resource allocation, handover schedule) notification</a:t>
             </a:r>
             <a:endParaRPr lang="en-US" altLang="zh-CN" sz="2000" b="0" i="0" dirty="0">
               <a:solidFill>
                 <a:srgbClr val="18181B"/>
               </a:solidFill>
               <a:effectLst/>
-              <a:latin typeface="CircularXXWeb"/>
+              <a:cs typeface="+mn-lt"/>
             </a:endParaRPr>
           </a:p>
           <a:p>
@@ -4147,7 +4205,7 @@
                 <a:solidFill>
                   <a:srgbClr val="18181B"/>
                 </a:solidFill>
-                <a:latin typeface="CircularXXWeb"/>
+                <a:cs typeface="+mn-lt"/>
               </a:rPr>
               <a:t>Multi-Session</a:t>
             </a:r>
@@ -4156,10 +4214,16 @@
                 <a:solidFill>
                   <a:srgbClr val="18181B"/>
                 </a:solidFill>
-                <a:latin typeface="CircularXXWeb"/>
+                <a:cs typeface="+mn-lt"/>
               </a:rPr>
               <a:t>:</a:t>
             </a:r>
+            <a:endParaRPr lang="en-US" altLang="zh-CN" sz="2000" dirty="0">
+              <a:solidFill>
+                <a:srgbClr val="18181B"/>
+              </a:solidFill>
+              <a:cs typeface="+mn-lt"/>
+            </a:endParaRPr>
           </a:p>
           <a:p>
             <a:pPr marL="742950" lvl="1" indent="-285750">
@@ -4170,15 +4234,21 @@
               <a:buChar char="•"/>
             </a:pPr>
             <a:r>
-              <a:rPr lang="en-US" altLang="zh-CN" sz="2000" dirty="0"/>
+              <a:rPr lang="en-US" altLang="zh-CN" sz="2000" dirty="0">
+                <a:cs typeface="+mn-lt"/>
+              </a:rPr>
               <a:t>Uses several session concurrently to</a:t>
             </a:r>
             <a:r>
-              <a:rPr lang="zh-CN" altLang="en-US" sz="2000" dirty="0"/>
+              <a:rPr lang="zh-CN" altLang="en-US" sz="2000" dirty="0">
+                <a:cs typeface="+mn-lt"/>
+              </a:rPr>
               <a:t> </a:t>
             </a:r>
             <a:r>
-              <a:rPr lang="en-US" altLang="zh-CN" sz="2000" dirty="0"/>
+              <a:rPr lang="en-US" altLang="zh-CN" sz="2000" dirty="0">
+                <a:cs typeface="+mn-lt"/>
+              </a:rPr>
               <a:t>f</a:t>
             </a:r>
             <a:r>
@@ -4186,22 +4256,70 @@
                 <a:solidFill>
                   <a:srgbClr val="18181B"/>
                 </a:solidFill>
-                <a:latin typeface="CircularXXWeb"/>
+                <a:cs typeface="+mn-lt"/>
               </a:rPr>
               <a:t>ill up bandwidth</a:t>
             </a:r>
-          </a:p>
-        </p:txBody>
-      </p:sp>
-      <p:sp>
-        <p:nvSpPr>
-          <p:cNvPr id="4" name="TextBox 5">
-            <a:extLst>
-              <a:ext uri="{FF2B5EF4-FFF2-40B4-BE49-F238E27FC236}">
-                <a16:creationId xmlns:a16="http://schemas.microsoft.com/office/drawing/2014/main" id="{F8F5E643-6164-515D-1EC1-3B314B379576}"/>
-              </a:ext>
-            </a:extLst>
-          </p:cNvPr>
+            <a:endParaRPr lang="en-US" altLang="zh-CN" sz="2000" dirty="0">
+              <a:solidFill>
+                <a:srgbClr val="18181B"/>
+              </a:solidFill>
+              <a:cs typeface="+mn-lt"/>
+            </a:endParaRPr>
+          </a:p>
+          <a:p>
+            <a:pPr marL="285750" lvl="0" indent="-285750">
+              <a:spcAft>
+                <a:spcPts val="600"/>
+              </a:spcAft>
+              <a:buFont typeface="Arial" panose="020B0604020202020204" pitchFamily="34" charset="0"/>
+              <a:buChar char="•"/>
+            </a:pPr>
+            <a:r>
+              <a:rPr lang="en-US" altLang="zh-CN" sz="2000" b="1" dirty="0">
+                <a:solidFill>
+                  <a:srgbClr val="18181B"/>
+                </a:solidFill>
+                <a:cs typeface="+mn-lt"/>
+              </a:rPr>
+              <a:t>QUIC:</a:t>
+            </a:r>
+            <a:endParaRPr lang="en-US" altLang="zh-CN" sz="2000" b="1" dirty="0">
+              <a:solidFill>
+                <a:srgbClr val="18181B"/>
+              </a:solidFill>
+              <a:cs typeface="+mn-lt"/>
+            </a:endParaRPr>
+          </a:p>
+          <a:p>
+            <a:pPr marL="742950" lvl="1" indent="-285750">
+              <a:spcAft>
+                <a:spcPts val="600"/>
+              </a:spcAft>
+              <a:buFont typeface="Arial" panose="020B0604020202020204" pitchFamily="34" charset="0"/>
+              <a:buChar char="•"/>
+            </a:pPr>
+            <a:r>
+              <a:rPr lang="en-US" altLang="zh-CN" sz="2000" dirty="0">
+                <a:solidFill>
+                  <a:srgbClr val="18181B"/>
+                </a:solidFill>
+                <a:cs typeface="+mn-lt"/>
+              </a:rPr>
+              <a:t>Decouple of congestion control and reliability</a:t>
+            </a:r>
+            <a:endParaRPr lang="en-US" altLang="zh-CN" sz="2000" dirty="0">
+              <a:solidFill>
+                <a:srgbClr val="18181B"/>
+              </a:solidFill>
+              <a:cs typeface="+mn-lt"/>
+            </a:endParaRPr>
+          </a:p>
+        </p:txBody>
+      </p:sp>
+      <p:sp>
+        <p:nvSpPr>
+          <p:cNvPr id="4" name="TextBox 5"/>
           <p:cNvSpPr txBox="1"/>
           <p:nvPr/>
         </p:nvSpPr>
@@ -4251,11 +4369,6 @@
         </p:txBody>
       </p:sp>
     </p:spTree>
-    <p:extLst>
-      <p:ext uri="{BB962C8B-B14F-4D97-AF65-F5344CB8AC3E}">
-        <p14:creationId xmlns:p14="http://schemas.microsoft.com/office/powerpoint/2010/main" val="2331503384"/>
-      </p:ext>
-    </p:extLst>
   </p:cSld>
   <p:clrMapOvr>
     <a:masterClrMapping/>
@@ -4321,6 +4434,13 @@
               </a:rPr>
               <a:t>Problem Statement</a:t>
             </a:r>
+            <a:endParaRPr lang="en-US" altLang="zh-CN" sz="4000" b="1" dirty="0">
+              <a:solidFill>
+                <a:srgbClr val="05174D"/>
+              </a:solidFill>
+              <a:latin typeface="Noto Sans SC" panose="020B0200000000000000" charset="-122"/>
+              <a:ea typeface="Noto Sans SC" panose="020B0200000000000000" charset="-122"/>
+            </a:endParaRPr>
           </a:p>
           <a:p>
             <a:pPr algn="just">
@@ -4366,7 +4486,6 @@
           <a:p>
             <a:fld id="{C1FF6DA9-008F-8B48-92A6-B652298478BF}" type="slidenum">
               <a:rPr lang="en-US" smtClean="0"/>
-              <a:t>4</a:t>
             </a:fld>
             <a:endParaRPr lang="en-US"/>
           </a:p>
@@ -4409,6 +4528,7 @@
               <a:rPr lang="en-US" altLang="zh-CN" dirty="0"/>
               <a:t>In satellite networks, handovers between satellites and beams occur very frequently—Starlink, for instance, performs a handover approximately every 15 seconds. </a:t>
             </a:r>
+            <a:endParaRPr lang="en-US" altLang="zh-CN" dirty="0"/>
           </a:p>
           <a:p>
             <a:endParaRPr lang="en-US" altLang="zh-CN" dirty="0"/>
@@ -4450,6 +4570,7 @@
               <a:rPr lang="en-US" altLang="zh-CN" dirty="0"/>
               <a:t>bandwidth.</a:t>
             </a:r>
+            <a:endParaRPr lang="en-US" altLang="zh-CN" dirty="0"/>
           </a:p>
           <a:p>
             <a:pPr marL="285750" indent="-285750">
@@ -4460,6 +4581,7 @@
               <a:rPr lang="en-US" altLang="zh-CN" dirty="0"/>
               <a:t>If a handover causes a burst of packet losses, TCP would mistakenly interpret this as network congestion and revert from Congestion Avoidance back to Slow Start, then to ramp up again through Slow Start into Congestion Avoidance. </a:t>
             </a:r>
+            <a:endParaRPr lang="en-US" altLang="zh-CN" dirty="0"/>
           </a:p>
           <a:p>
             <a:endParaRPr lang="en-US" altLang="zh-CN" dirty="0"/>
@@ -4469,6 +4591,7 @@
               <a:rPr lang="en-US" altLang="zh-CN" dirty="0"/>
               <a:t>Transport protocol performance can be enhanced with kind of OAM capability:</a:t>
             </a:r>
+            <a:endParaRPr lang="en-US" altLang="zh-CN" dirty="0"/>
           </a:p>
           <a:p>
             <a:pPr marL="285750" indent="-285750">
@@ -4487,6 +4610,7 @@
               <a:rPr lang="en-US" altLang="zh-CN" dirty="0"/>
               <a:t>; </a:t>
             </a:r>
+            <a:endParaRPr lang="en-US" altLang="zh-CN" dirty="0"/>
           </a:p>
           <a:p>
             <a:pPr marL="742950" lvl="1" indent="-285750">
@@ -4497,6 +4621,7 @@
               <a:rPr lang="en-US" altLang="zh-CN" dirty="0"/>
               <a:t>Rationale: cumulative/delayed ACK introduces more latency in the control loop. </a:t>
             </a:r>
+            <a:endParaRPr lang="en-US" altLang="zh-CN" dirty="0"/>
           </a:p>
           <a:p>
             <a:pPr marL="285750" indent="-285750">
@@ -4507,6 +4632,7 @@
               <a:rPr lang="en-US" altLang="zh-CN" dirty="0"/>
               <a:t>Detect connectivity break/recovery time;</a:t>
             </a:r>
+            <a:endParaRPr lang="en-US" altLang="zh-CN" dirty="0"/>
           </a:p>
           <a:p>
             <a:pPr marL="742950" lvl="1" indent="-285750">
@@ -4517,6 +4643,7 @@
               <a:rPr lang="en-US" altLang="zh-CN" dirty="0"/>
               <a:t>Rationale: differentiate loss reason either by congestion or by handover.</a:t>
             </a:r>
+            <a:endParaRPr lang="en-US" altLang="zh-CN" dirty="0"/>
           </a:p>
         </p:txBody>
       </p:sp>
@@ -4547,13 +4674,7 @@
       </p:grpSpPr>
       <p:sp>
         <p:nvSpPr>
-          <p:cNvPr id="2" name="TextBox 5">
-            <a:extLst>
-              <a:ext uri="{FF2B5EF4-FFF2-40B4-BE49-F238E27FC236}">
-                <a16:creationId xmlns:a16="http://schemas.microsoft.com/office/drawing/2014/main" id="{117298F5-3EEE-E007-2D67-3679758D987C}"/>
-              </a:ext>
-            </a:extLst>
-          </p:cNvPr>
+          <p:cNvPr id="2" name="TextBox 5"/>
           <p:cNvSpPr txBox="1"/>
           <p:nvPr/>
         </p:nvSpPr>
@@ -4614,13 +4735,7 @@
       </p:sp>
       <p:sp>
         <p:nvSpPr>
-          <p:cNvPr id="35" name="文本框 34">
-            <a:extLst>
-              <a:ext uri="{FF2B5EF4-FFF2-40B4-BE49-F238E27FC236}">
-                <a16:creationId xmlns:a16="http://schemas.microsoft.com/office/drawing/2014/main" id="{36A1C4EA-54F1-59C5-E316-6A5885C1B78F}"/>
-              </a:ext>
-            </a:extLst>
-          </p:cNvPr>
+          <p:cNvPr id="35" name="文本框 34"/>
           <p:cNvSpPr txBox="1"/>
           <p:nvPr/>
         </p:nvSpPr>
@@ -4649,6 +4764,7 @@
               <a:rPr lang="en-US" altLang="zh-CN" sz="2400" b="1" dirty="0"/>
               <a:t>Some options:</a:t>
             </a:r>
+            <a:endParaRPr lang="en-US" altLang="zh-CN" sz="2400" b="1" dirty="0"/>
           </a:p>
           <a:p>
             <a:pPr marL="457200" indent="-457200">
@@ -4661,6 +4777,7 @@
               <a:rPr lang="en-US" altLang="zh-CN" sz="2400" b="1" dirty="0"/>
               <a:t>Per-session OAM: </a:t>
             </a:r>
+            <a:endParaRPr lang="en-US" altLang="zh-CN" sz="2400" b="1" dirty="0"/>
           </a:p>
           <a:p>
             <a:pPr marL="914400" lvl="1" indent="-457200">
@@ -4674,6 +4791,7 @@
               <a:rPr lang="en-US" altLang="zh-CN" sz="2400" dirty="0"/>
               <a:t>new message/flag/option for TCP/QUIC</a:t>
             </a:r>
+            <a:endParaRPr lang="en-US" altLang="zh-CN" sz="2400" dirty="0"/>
           </a:p>
           <a:p>
             <a:pPr marL="914400" lvl="1" indent="-457200">
@@ -4687,6 +4805,7 @@
               <a:rPr lang="en-US" altLang="zh-CN" sz="2400" dirty="0"/>
               <a:t>e.g. a new flag in TCP requesting immediate ACK</a:t>
             </a:r>
+            <a:endParaRPr lang="en-US" altLang="zh-CN" sz="2400" dirty="0"/>
           </a:p>
           <a:p>
             <a:pPr marL="457200" indent="-457200">
@@ -4699,6 +4818,7 @@
               <a:rPr lang="en-US" altLang="zh-CN" sz="2400" b="1" dirty="0"/>
               <a:t>Multi-session shared OAM: </a:t>
             </a:r>
+            <a:endParaRPr lang="en-US" altLang="zh-CN" sz="2400" b="1" dirty="0"/>
           </a:p>
           <a:p>
             <a:pPr marL="914400" lvl="1" indent="-457200">
@@ -4712,6 +4832,7 @@
               <a:rPr lang="en-US" altLang="zh-CN" sz="2400" dirty="0"/>
               <a:t>IP layer connectivity detection, not impact by WRED/Congestion Control. </a:t>
             </a:r>
+            <a:endParaRPr lang="en-US" altLang="zh-CN" sz="2400" dirty="0"/>
           </a:p>
           <a:p>
             <a:pPr marL="914400" lvl="1" indent="-457200">
@@ -4733,15 +4854,11 @@
               <a:rPr lang="en-US" altLang="zh-CN" sz="2400" dirty="0"/>
               <a:t>BFD in echo or 2-way mode, transport layer can track connectivity state change as what BGP does.</a:t>
             </a:r>
+            <a:endParaRPr lang="en-US" altLang="zh-CN" sz="2400" dirty="0"/>
           </a:p>
         </p:txBody>
       </p:sp>
     </p:spTree>
-    <p:extLst>
-      <p:ext uri="{BB962C8B-B14F-4D97-AF65-F5344CB8AC3E}">
-        <p14:creationId xmlns:p14="http://schemas.microsoft.com/office/powerpoint/2010/main" val="4066483809"/>
-      </p:ext>
-    </p:extLst>
   </p:cSld>
   <p:clrMapOvr>
     <a:masterClrMapping/>
@@ -4825,13 +4942,7 @@
       </p:sp>
       <p:sp>
         <p:nvSpPr>
-          <p:cNvPr id="16" name="文本框 15">
-            <a:extLst>
-              <a:ext uri="{FF2B5EF4-FFF2-40B4-BE49-F238E27FC236}">
-                <a16:creationId xmlns:a16="http://schemas.microsoft.com/office/drawing/2014/main" id="{92DEE1A0-3B19-A149-DF85-E01036FD494D}"/>
-              </a:ext>
-            </a:extLst>
-          </p:cNvPr>
+          <p:cNvPr id="16" name="文本框 15"/>
           <p:cNvSpPr txBox="1"/>
           <p:nvPr/>
         </p:nvSpPr>
@@ -4882,6 +4993,7 @@
               <a:rPr lang="en-US" altLang="zh-CN" sz="1800" b="1" dirty="0"/>
               <a:t>.</a:t>
             </a:r>
+            <a:endParaRPr lang="en-US" altLang="zh-CN" sz="1800" b="1" dirty="0"/>
           </a:p>
           <a:p>
             <a:pPr marL="342900" indent="-342900">
@@ -4909,6 +5021,7 @@
               <a:rPr lang="en-US" altLang="zh-CN" dirty="0"/>
               <a:t>using BFD to detect beam/satellite handover.  TCP tracks state change of BFD. </a:t>
             </a:r>
+            <a:endParaRPr lang="en-US" altLang="zh-CN" dirty="0"/>
           </a:p>
           <a:p>
             <a:pPr marL="800100" lvl="1" indent="-342900">
@@ -4946,6 +5059,7 @@
               <a:rPr lang="en-US" altLang="zh-CN" dirty="0"/>
               <a:t>.</a:t>
             </a:r>
+            <a:endParaRPr lang="en-US" altLang="zh-CN" dirty="0"/>
           </a:p>
           <a:p>
             <a:pPr marL="800100" lvl="1" indent="-342900">
@@ -4959,18 +5073,13 @@
               <a:rPr lang="en-US" altLang="zh-CN" dirty="0"/>
               <a:t>When BFD up, recover the frozen variables.</a:t>
             </a:r>
+            <a:endParaRPr lang="en-US" altLang="zh-CN" dirty="0"/>
           </a:p>
         </p:txBody>
       </p:sp>
       <p:grpSp>
         <p:nvGrpSpPr>
-          <p:cNvPr id="1082" name="组合 1081">
-            <a:extLst>
-              <a:ext uri="{FF2B5EF4-FFF2-40B4-BE49-F238E27FC236}">
-                <a16:creationId xmlns:a16="http://schemas.microsoft.com/office/drawing/2014/main" id="{8A5D72A5-A179-9518-D5EB-9A438F0CFF00}"/>
-              </a:ext>
-            </a:extLst>
-          </p:cNvPr>
+          <p:cNvPr id="1082" name="组合 1081"/>
           <p:cNvGrpSpPr/>
           <p:nvPr/>
         </p:nvGrpSpPr>
@@ -4984,15 +5093,8 @@
         </p:grpSpPr>
         <p:cxnSp>
           <p:nvCxnSpPr>
-            <p:cNvPr id="21" name="直接连接符 20">
-              <a:extLst>
-                <a:ext uri="{FF2B5EF4-FFF2-40B4-BE49-F238E27FC236}">
-                  <a16:creationId xmlns:a16="http://schemas.microsoft.com/office/drawing/2014/main" id="{940FE768-FE40-70F6-65EF-8B4940527C4F}"/>
-                </a:ext>
-              </a:extLst>
-            </p:cNvPr>
+            <p:cNvPr id="21" name="直接连接符 20"/>
             <p:cNvCxnSpPr>
-              <a:cxnSpLocks/>
               <a:stCxn id="23" idx="1"/>
               <a:endCxn id="23" idx="3"/>
             </p:cNvCxnSpPr>
@@ -5034,13 +5136,7 @@
         </p:cxnSp>
         <p:sp>
           <p:nvSpPr>
-            <p:cNvPr id="23" name="双括号 22">
-              <a:extLst>
-                <a:ext uri="{FF2B5EF4-FFF2-40B4-BE49-F238E27FC236}">
-                  <a16:creationId xmlns:a16="http://schemas.microsoft.com/office/drawing/2014/main" id="{3AC81A44-F130-D3E4-2503-FF9EE56D332D}"/>
-                </a:ext>
-              </a:extLst>
-            </p:cNvPr>
+            <p:cNvPr id="23" name="双括号 22"/>
             <p:cNvSpPr/>
             <p:nvPr/>
           </p:nvSpPr>
@@ -5089,13 +5185,7 @@
       </p:grpSp>
       <p:sp>
         <p:nvSpPr>
-          <p:cNvPr id="31" name="文本框 30">
-            <a:extLst>
-              <a:ext uri="{FF2B5EF4-FFF2-40B4-BE49-F238E27FC236}">
-                <a16:creationId xmlns:a16="http://schemas.microsoft.com/office/drawing/2014/main" id="{2878B3BC-3A08-F664-0B4C-8168859B3BBC}"/>
-              </a:ext>
-            </a:extLst>
-          </p:cNvPr>
+          <p:cNvPr id="31" name="文本框 30"/>
           <p:cNvSpPr txBox="1"/>
           <p:nvPr/>
         </p:nvSpPr>
@@ -5126,13 +5216,7 @@
       </p:sp>
       <p:sp>
         <p:nvSpPr>
-          <p:cNvPr id="32" name="矩形 31">
-            <a:extLst>
-              <a:ext uri="{FF2B5EF4-FFF2-40B4-BE49-F238E27FC236}">
-                <a16:creationId xmlns:a16="http://schemas.microsoft.com/office/drawing/2014/main" id="{05E51BB9-E877-A5AE-6854-57E35F33C522}"/>
-              </a:ext>
-            </a:extLst>
-          </p:cNvPr>
+          <p:cNvPr id="32" name="矩形 31"/>
           <p:cNvSpPr/>
           <p:nvPr/>
         </p:nvSpPr>
@@ -5181,13 +5265,7 @@
       </p:sp>
       <p:sp>
         <p:nvSpPr>
-          <p:cNvPr id="1052" name="文本框 1051">
-            <a:extLst>
-              <a:ext uri="{FF2B5EF4-FFF2-40B4-BE49-F238E27FC236}">
-                <a16:creationId xmlns:a16="http://schemas.microsoft.com/office/drawing/2014/main" id="{492376DA-4505-C6EF-FB28-A5D0A0920D70}"/>
-              </a:ext>
-            </a:extLst>
-          </p:cNvPr>
+          <p:cNvPr id="1052" name="文本框 1051"/>
           <p:cNvSpPr txBox="1"/>
           <p:nvPr/>
         </p:nvSpPr>
@@ -5218,13 +5296,7 @@
       </p:sp>
       <p:sp>
         <p:nvSpPr>
-          <p:cNvPr id="1056" name="文本框 1055">
-            <a:extLst>
-              <a:ext uri="{FF2B5EF4-FFF2-40B4-BE49-F238E27FC236}">
-                <a16:creationId xmlns:a16="http://schemas.microsoft.com/office/drawing/2014/main" id="{3DE0A9B4-BF33-0BBD-2C52-DCACCDC1C8E4}"/>
-              </a:ext>
-            </a:extLst>
-          </p:cNvPr>
+          <p:cNvPr id="1056" name="文本框 1055"/>
           <p:cNvSpPr txBox="1"/>
           <p:nvPr/>
         </p:nvSpPr>
@@ -5255,13 +5327,7 @@
       </p:sp>
       <p:sp>
         <p:nvSpPr>
-          <p:cNvPr id="1057" name="文本框 1056">
-            <a:extLst>
-              <a:ext uri="{FF2B5EF4-FFF2-40B4-BE49-F238E27FC236}">
-                <a16:creationId xmlns:a16="http://schemas.microsoft.com/office/drawing/2014/main" id="{EC67BC3D-7EFC-2618-11BE-60887DA143F5}"/>
-              </a:ext>
-            </a:extLst>
-          </p:cNvPr>
+          <p:cNvPr id="1057" name="文本框 1056"/>
           <p:cNvSpPr txBox="1"/>
           <p:nvPr/>
         </p:nvSpPr>
@@ -5292,15 +5358,8 @@
       </p:sp>
       <p:cxnSp>
         <p:nvCxnSpPr>
-          <p:cNvPr id="1063" name="直接连接符 1062">
-            <a:extLst>
-              <a:ext uri="{FF2B5EF4-FFF2-40B4-BE49-F238E27FC236}">
-                <a16:creationId xmlns:a16="http://schemas.microsoft.com/office/drawing/2014/main" id="{C40C6E86-0030-5CF0-BCA6-186349D71F83}"/>
-              </a:ext>
-            </a:extLst>
-          </p:cNvPr>
+          <p:cNvPr id="1063" name="直接连接符 1062"/>
           <p:cNvCxnSpPr>
-            <a:cxnSpLocks/>
             <a:stCxn id="1064" idx="1"/>
             <a:endCxn id="1064" idx="3"/>
           </p:cNvCxnSpPr>
@@ -5342,13 +5401,7 @@
       </p:cxnSp>
       <p:sp>
         <p:nvSpPr>
-          <p:cNvPr id="1064" name="双括号 1063">
-            <a:extLst>
-              <a:ext uri="{FF2B5EF4-FFF2-40B4-BE49-F238E27FC236}">
-                <a16:creationId xmlns:a16="http://schemas.microsoft.com/office/drawing/2014/main" id="{324D2D8B-9067-0886-53FF-194D5A4F3028}"/>
-              </a:ext>
-            </a:extLst>
-          </p:cNvPr>
+          <p:cNvPr id="1064" name="双括号 1063"/>
           <p:cNvSpPr/>
           <p:nvPr/>
         </p:nvSpPr>
@@ -5396,13 +5449,7 @@
       </p:sp>
       <p:grpSp>
         <p:nvGrpSpPr>
-          <p:cNvPr id="1079" name="组合 1078">
-            <a:extLst>
-              <a:ext uri="{FF2B5EF4-FFF2-40B4-BE49-F238E27FC236}">
-                <a16:creationId xmlns:a16="http://schemas.microsoft.com/office/drawing/2014/main" id="{A92F3310-A008-50D7-9833-8328869E8A44}"/>
-              </a:ext>
-            </a:extLst>
-          </p:cNvPr>
+          <p:cNvPr id="1079" name="组合 1078"/>
           <p:cNvGrpSpPr/>
           <p:nvPr/>
         </p:nvGrpSpPr>
@@ -5416,13 +5463,7 @@
         </p:grpSpPr>
         <p:sp>
           <p:nvSpPr>
-            <p:cNvPr id="33" name="菱形 32">
-              <a:extLst>
-                <a:ext uri="{FF2B5EF4-FFF2-40B4-BE49-F238E27FC236}">
-                  <a16:creationId xmlns:a16="http://schemas.microsoft.com/office/drawing/2014/main" id="{C5D544D0-89A1-165E-A3F6-7DAEC83CB1BF}"/>
-                </a:ext>
-              </a:extLst>
-            </p:cNvPr>
+            <p:cNvPr id="33" name="菱形 32"/>
             <p:cNvSpPr/>
             <p:nvPr/>
           </p:nvSpPr>
@@ -5473,13 +5514,7 @@
         </p:sp>
         <p:sp>
           <p:nvSpPr>
-            <p:cNvPr id="34" name="菱形 33">
-              <a:extLst>
-                <a:ext uri="{FF2B5EF4-FFF2-40B4-BE49-F238E27FC236}">
-                  <a16:creationId xmlns:a16="http://schemas.microsoft.com/office/drawing/2014/main" id="{F8680E92-7AA2-04A5-A911-53A3CE462E57}"/>
-                </a:ext>
-              </a:extLst>
-            </p:cNvPr>
+            <p:cNvPr id="34" name="菱形 33"/>
             <p:cNvSpPr/>
             <p:nvPr/>
           </p:nvSpPr>
@@ -5530,13 +5565,7 @@
         </p:sp>
         <p:sp>
           <p:nvSpPr>
-            <p:cNvPr id="35" name="菱形 34">
-              <a:extLst>
-                <a:ext uri="{FF2B5EF4-FFF2-40B4-BE49-F238E27FC236}">
-                  <a16:creationId xmlns:a16="http://schemas.microsoft.com/office/drawing/2014/main" id="{64D9BB77-FFA0-A2F9-912B-452B7BC56E91}"/>
-                </a:ext>
-              </a:extLst>
-            </p:cNvPr>
+            <p:cNvPr id="35" name="菱形 34"/>
             <p:cNvSpPr/>
             <p:nvPr/>
           </p:nvSpPr>
@@ -5587,13 +5616,7 @@
         </p:sp>
         <p:sp>
           <p:nvSpPr>
-            <p:cNvPr id="36" name="菱形 35">
-              <a:extLst>
-                <a:ext uri="{FF2B5EF4-FFF2-40B4-BE49-F238E27FC236}">
-                  <a16:creationId xmlns:a16="http://schemas.microsoft.com/office/drawing/2014/main" id="{541F7C8B-95D8-1BD3-9F66-448BC7B930D8}"/>
-                </a:ext>
-              </a:extLst>
-            </p:cNvPr>
+            <p:cNvPr id="36" name="菱形 35"/>
             <p:cNvSpPr/>
             <p:nvPr/>
           </p:nvSpPr>
@@ -5644,13 +5667,7 @@
         </p:sp>
         <p:sp>
           <p:nvSpPr>
-            <p:cNvPr id="37" name="菱形 36">
-              <a:extLst>
-                <a:ext uri="{FF2B5EF4-FFF2-40B4-BE49-F238E27FC236}">
-                  <a16:creationId xmlns:a16="http://schemas.microsoft.com/office/drawing/2014/main" id="{C26E0E42-5BB9-E3E0-E1E9-6EF9DD745DA8}"/>
-                </a:ext>
-              </a:extLst>
-            </p:cNvPr>
+            <p:cNvPr id="37" name="菱形 36"/>
             <p:cNvSpPr/>
             <p:nvPr/>
           </p:nvSpPr>
@@ -5701,13 +5718,7 @@
         </p:sp>
         <p:sp>
           <p:nvSpPr>
-            <p:cNvPr id="38" name="菱形 37">
-              <a:extLst>
-                <a:ext uri="{FF2B5EF4-FFF2-40B4-BE49-F238E27FC236}">
-                  <a16:creationId xmlns:a16="http://schemas.microsoft.com/office/drawing/2014/main" id="{9D593FE4-F785-48B4-A555-46D33CC57ADC}"/>
-                </a:ext>
-              </a:extLst>
-            </p:cNvPr>
+            <p:cNvPr id="38" name="菱形 37"/>
             <p:cNvSpPr/>
             <p:nvPr/>
           </p:nvSpPr>
@@ -5758,16 +5769,8 @@
         </p:sp>
         <p:cxnSp>
           <p:nvCxnSpPr>
-            <p:cNvPr id="43" name="直接连接符 42">
-              <a:extLst>
-                <a:ext uri="{FF2B5EF4-FFF2-40B4-BE49-F238E27FC236}">
-                  <a16:creationId xmlns:a16="http://schemas.microsoft.com/office/drawing/2014/main" id="{E11ECAAD-4DC8-36B7-4D9A-70C7FEE99103}"/>
-                </a:ext>
-              </a:extLst>
-            </p:cNvPr>
-            <p:cNvCxnSpPr>
-              <a:cxnSpLocks/>
-            </p:cNvCxnSpPr>
+            <p:cNvPr id="43" name="直接连接符 42"/>
+            <p:cNvCxnSpPr/>
             <p:nvPr/>
           </p:nvCxnSpPr>
           <p:spPr>
@@ -5802,16 +5805,8 @@
         </p:cxnSp>
         <p:cxnSp>
           <p:nvCxnSpPr>
-            <p:cNvPr id="45" name="直接连接符 44">
-              <a:extLst>
-                <a:ext uri="{FF2B5EF4-FFF2-40B4-BE49-F238E27FC236}">
-                  <a16:creationId xmlns:a16="http://schemas.microsoft.com/office/drawing/2014/main" id="{B49C0584-90A1-9F8B-BE28-AAE58E4429BD}"/>
-                </a:ext>
-              </a:extLst>
-            </p:cNvPr>
-            <p:cNvCxnSpPr>
-              <a:cxnSpLocks/>
-            </p:cNvCxnSpPr>
+            <p:cNvPr id="45" name="直接连接符 44"/>
+            <p:cNvCxnSpPr/>
             <p:nvPr/>
           </p:nvCxnSpPr>
           <p:spPr>
@@ -5846,13 +5841,7 @@
         </p:cxnSp>
         <p:sp>
           <p:nvSpPr>
-            <p:cNvPr id="47" name="菱形 46">
-              <a:extLst>
-                <a:ext uri="{FF2B5EF4-FFF2-40B4-BE49-F238E27FC236}">
-                  <a16:creationId xmlns:a16="http://schemas.microsoft.com/office/drawing/2014/main" id="{E50E45B4-65F4-5304-A81C-C336E2B15840}"/>
-                </a:ext>
-              </a:extLst>
-            </p:cNvPr>
+            <p:cNvPr id="47" name="菱形 46"/>
             <p:cNvSpPr/>
             <p:nvPr/>
           </p:nvSpPr>
@@ -5903,13 +5892,7 @@
         </p:sp>
         <p:sp>
           <p:nvSpPr>
-            <p:cNvPr id="48" name="菱形 47">
-              <a:extLst>
-                <a:ext uri="{FF2B5EF4-FFF2-40B4-BE49-F238E27FC236}">
-                  <a16:creationId xmlns:a16="http://schemas.microsoft.com/office/drawing/2014/main" id="{87F9CFF7-BA73-B9C2-934A-510649B669C6}"/>
-                </a:ext>
-              </a:extLst>
-            </p:cNvPr>
+            <p:cNvPr id="48" name="菱形 47"/>
             <p:cNvSpPr/>
             <p:nvPr/>
           </p:nvSpPr>
@@ -5960,13 +5943,7 @@
         </p:sp>
         <p:sp>
           <p:nvSpPr>
-            <p:cNvPr id="49" name="菱形 48">
-              <a:extLst>
-                <a:ext uri="{FF2B5EF4-FFF2-40B4-BE49-F238E27FC236}">
-                  <a16:creationId xmlns:a16="http://schemas.microsoft.com/office/drawing/2014/main" id="{64F801B4-B325-1C34-3F36-E20A12350327}"/>
-                </a:ext>
-              </a:extLst>
-            </p:cNvPr>
+            <p:cNvPr id="49" name="菱形 48"/>
             <p:cNvSpPr/>
             <p:nvPr/>
           </p:nvSpPr>
@@ -6017,13 +5994,7 @@
         </p:sp>
         <p:sp>
           <p:nvSpPr>
-            <p:cNvPr id="50" name="菱形 49">
-              <a:extLst>
-                <a:ext uri="{FF2B5EF4-FFF2-40B4-BE49-F238E27FC236}">
-                  <a16:creationId xmlns:a16="http://schemas.microsoft.com/office/drawing/2014/main" id="{CCDD16DD-987C-3739-F2C3-F5D89C5E84FF}"/>
-                </a:ext>
-              </a:extLst>
-            </p:cNvPr>
+            <p:cNvPr id="50" name="菱形 49"/>
             <p:cNvSpPr/>
             <p:nvPr/>
           </p:nvSpPr>
@@ -6074,13 +6045,7 @@
         </p:sp>
         <p:sp>
           <p:nvSpPr>
-            <p:cNvPr id="51" name="菱形 50">
-              <a:extLst>
-                <a:ext uri="{FF2B5EF4-FFF2-40B4-BE49-F238E27FC236}">
-                  <a16:creationId xmlns:a16="http://schemas.microsoft.com/office/drawing/2014/main" id="{D9CA2C47-F7F0-A4E9-9401-7719BF6B20AF}"/>
-                </a:ext>
-              </a:extLst>
-            </p:cNvPr>
+            <p:cNvPr id="51" name="菱形 50"/>
             <p:cNvSpPr/>
             <p:nvPr/>
           </p:nvSpPr>
@@ -6131,13 +6096,7 @@
         </p:sp>
         <p:sp>
           <p:nvSpPr>
-            <p:cNvPr id="52" name="菱形 51">
-              <a:extLst>
-                <a:ext uri="{FF2B5EF4-FFF2-40B4-BE49-F238E27FC236}">
-                  <a16:creationId xmlns:a16="http://schemas.microsoft.com/office/drawing/2014/main" id="{803BF8D8-39DF-6E59-A6DE-BDD298896B6D}"/>
-                </a:ext>
-              </a:extLst>
-            </p:cNvPr>
+            <p:cNvPr id="52" name="菱形 51"/>
             <p:cNvSpPr/>
             <p:nvPr/>
           </p:nvSpPr>
@@ -6192,13 +6151,7 @@
         </p:sp>
         <p:sp>
           <p:nvSpPr>
-            <p:cNvPr id="57" name="任意多边形: 形状 56">
-              <a:extLst>
-                <a:ext uri="{FF2B5EF4-FFF2-40B4-BE49-F238E27FC236}">
-                  <a16:creationId xmlns:a16="http://schemas.microsoft.com/office/drawing/2014/main" id="{3FA3DD45-0AD1-AD25-2876-62ED8AB09223}"/>
-                </a:ext>
-              </a:extLst>
-            </p:cNvPr>
+            <p:cNvPr id="57" name="任意多边形: 形状 56"/>
             <p:cNvSpPr/>
             <p:nvPr/>
           </p:nvSpPr>
@@ -6300,13 +6253,7 @@
         </p:sp>
         <p:sp>
           <p:nvSpPr>
-            <p:cNvPr id="58" name="任意多边形: 形状 57">
-              <a:extLst>
-                <a:ext uri="{FF2B5EF4-FFF2-40B4-BE49-F238E27FC236}">
-                  <a16:creationId xmlns:a16="http://schemas.microsoft.com/office/drawing/2014/main" id="{9F9D7FD9-5B11-C8E4-B863-CABC0F5110DF}"/>
-                </a:ext>
-              </a:extLst>
-            </p:cNvPr>
+            <p:cNvPr id="58" name="任意多边形: 形状 57"/>
             <p:cNvSpPr/>
             <p:nvPr/>
           </p:nvSpPr>
@@ -6396,13 +6343,7 @@
         </p:sp>
         <p:sp>
           <p:nvSpPr>
-            <p:cNvPr id="59" name="任意多边形: 形状 58">
-              <a:extLst>
-                <a:ext uri="{FF2B5EF4-FFF2-40B4-BE49-F238E27FC236}">
-                  <a16:creationId xmlns:a16="http://schemas.microsoft.com/office/drawing/2014/main" id="{F4D3EC0A-652F-339F-E9AB-B38C80A10C16}"/>
-                </a:ext>
-              </a:extLst>
-            </p:cNvPr>
+            <p:cNvPr id="59" name="任意多边形: 形状 58"/>
             <p:cNvSpPr/>
             <p:nvPr/>
           </p:nvSpPr>
@@ -6472,13 +6413,7 @@
         </p:sp>
         <p:sp>
           <p:nvSpPr>
-            <p:cNvPr id="60" name="菱形 59">
-              <a:extLst>
-                <a:ext uri="{FF2B5EF4-FFF2-40B4-BE49-F238E27FC236}">
-                  <a16:creationId xmlns:a16="http://schemas.microsoft.com/office/drawing/2014/main" id="{2134983D-AA9B-3BB4-8A21-B4B4A817FB9C}"/>
-                </a:ext>
-              </a:extLst>
-            </p:cNvPr>
+            <p:cNvPr id="60" name="菱形 59"/>
             <p:cNvSpPr/>
             <p:nvPr/>
           </p:nvSpPr>
@@ -6533,13 +6468,7 @@
         </p:sp>
         <p:sp>
           <p:nvSpPr>
-            <p:cNvPr id="61" name="菱形 60">
-              <a:extLst>
-                <a:ext uri="{FF2B5EF4-FFF2-40B4-BE49-F238E27FC236}">
-                  <a16:creationId xmlns:a16="http://schemas.microsoft.com/office/drawing/2014/main" id="{677E8C04-61AA-A46B-F153-472258AFFB48}"/>
-                </a:ext>
-              </a:extLst>
-            </p:cNvPr>
+            <p:cNvPr id="61" name="菱形 60"/>
             <p:cNvSpPr/>
             <p:nvPr/>
           </p:nvSpPr>
@@ -6594,13 +6523,7 @@
         </p:sp>
         <p:sp>
           <p:nvSpPr>
-            <p:cNvPr id="62" name="菱形 61">
-              <a:extLst>
-                <a:ext uri="{FF2B5EF4-FFF2-40B4-BE49-F238E27FC236}">
-                  <a16:creationId xmlns:a16="http://schemas.microsoft.com/office/drawing/2014/main" id="{CE7043FE-6ECE-5A08-91C7-628EE1B8FCC5}"/>
-                </a:ext>
-              </a:extLst>
-            </p:cNvPr>
+            <p:cNvPr id="62" name="菱形 61"/>
             <p:cNvSpPr/>
             <p:nvPr/>
           </p:nvSpPr>
@@ -6655,13 +6578,7 @@
         </p:sp>
         <p:sp>
           <p:nvSpPr>
-            <p:cNvPr id="63" name="菱形 62">
-              <a:extLst>
-                <a:ext uri="{FF2B5EF4-FFF2-40B4-BE49-F238E27FC236}">
-                  <a16:creationId xmlns:a16="http://schemas.microsoft.com/office/drawing/2014/main" id="{05F406A8-A92B-63B7-1A87-60E36C86C38A}"/>
-                </a:ext>
-              </a:extLst>
-            </p:cNvPr>
+            <p:cNvPr id="63" name="菱形 62"/>
             <p:cNvSpPr/>
             <p:nvPr/>
           </p:nvSpPr>
@@ -6716,13 +6633,7 @@
         </p:sp>
         <p:sp>
           <p:nvSpPr>
-            <p:cNvPr id="1024" name="菱形 1023">
-              <a:extLst>
-                <a:ext uri="{FF2B5EF4-FFF2-40B4-BE49-F238E27FC236}">
-                  <a16:creationId xmlns:a16="http://schemas.microsoft.com/office/drawing/2014/main" id="{82E18D1D-B782-488C-1C53-FBE74CE809FC}"/>
-                </a:ext>
-              </a:extLst>
-            </p:cNvPr>
+            <p:cNvPr id="1024" name="菱形 1023"/>
             <p:cNvSpPr/>
             <p:nvPr/>
           </p:nvSpPr>
@@ -6777,13 +6688,7 @@
         </p:sp>
         <p:sp>
           <p:nvSpPr>
-            <p:cNvPr id="1025" name="菱形 1024">
-              <a:extLst>
-                <a:ext uri="{FF2B5EF4-FFF2-40B4-BE49-F238E27FC236}">
-                  <a16:creationId xmlns:a16="http://schemas.microsoft.com/office/drawing/2014/main" id="{C5DDA661-3340-2F52-6524-830F7520ECC1}"/>
-                </a:ext>
-              </a:extLst>
-            </p:cNvPr>
+            <p:cNvPr id="1025" name="菱形 1024"/>
             <p:cNvSpPr/>
             <p:nvPr/>
           </p:nvSpPr>
@@ -6838,13 +6743,7 @@
         </p:sp>
         <p:sp>
           <p:nvSpPr>
-            <p:cNvPr id="1027" name="菱形 1026">
-              <a:extLst>
-                <a:ext uri="{FF2B5EF4-FFF2-40B4-BE49-F238E27FC236}">
-                  <a16:creationId xmlns:a16="http://schemas.microsoft.com/office/drawing/2014/main" id="{65437069-3036-6DC6-6A09-1F196373EFB1}"/>
-                </a:ext>
-              </a:extLst>
-            </p:cNvPr>
+            <p:cNvPr id="1027" name="菱形 1026"/>
             <p:cNvSpPr/>
             <p:nvPr/>
           </p:nvSpPr>
@@ -6899,13 +6798,7 @@
         </p:sp>
         <p:sp>
           <p:nvSpPr>
-            <p:cNvPr id="1029" name="任意多边形: 形状 1028">
-              <a:extLst>
-                <a:ext uri="{FF2B5EF4-FFF2-40B4-BE49-F238E27FC236}">
-                  <a16:creationId xmlns:a16="http://schemas.microsoft.com/office/drawing/2014/main" id="{DA0B7363-928B-1FE8-AC1A-E0D169E2E7FA}"/>
-                </a:ext>
-              </a:extLst>
-            </p:cNvPr>
+            <p:cNvPr id="1029" name="任意多边形: 形状 1028"/>
             <p:cNvSpPr/>
             <p:nvPr/>
           </p:nvSpPr>
@@ -7001,13 +6894,7 @@
         </p:sp>
         <p:sp>
           <p:nvSpPr>
-            <p:cNvPr id="1048" name="文本框 1047">
-              <a:extLst>
-                <a:ext uri="{FF2B5EF4-FFF2-40B4-BE49-F238E27FC236}">
-                  <a16:creationId xmlns:a16="http://schemas.microsoft.com/office/drawing/2014/main" id="{3077EE70-FEC6-7596-3695-279E74FC86B6}"/>
-                </a:ext>
-              </a:extLst>
-            </p:cNvPr>
+            <p:cNvPr id="1048" name="文本框 1047"/>
             <p:cNvSpPr txBox="1"/>
             <p:nvPr/>
           </p:nvSpPr>
@@ -7038,13 +6925,7 @@
         </p:sp>
         <p:sp>
           <p:nvSpPr>
-            <p:cNvPr id="1049" name="文本框 1048">
-              <a:extLst>
-                <a:ext uri="{FF2B5EF4-FFF2-40B4-BE49-F238E27FC236}">
-                  <a16:creationId xmlns:a16="http://schemas.microsoft.com/office/drawing/2014/main" id="{165C5CA9-3E40-0447-5A21-3DDB15BF0EE7}"/>
-                </a:ext>
-              </a:extLst>
-            </p:cNvPr>
+            <p:cNvPr id="1049" name="文本框 1048"/>
             <p:cNvSpPr txBox="1"/>
             <p:nvPr/>
           </p:nvSpPr>
@@ -7075,13 +6956,7 @@
         </p:sp>
         <p:sp>
           <p:nvSpPr>
-            <p:cNvPr id="1054" name="文本框 1053">
-              <a:extLst>
-                <a:ext uri="{FF2B5EF4-FFF2-40B4-BE49-F238E27FC236}">
-                  <a16:creationId xmlns:a16="http://schemas.microsoft.com/office/drawing/2014/main" id="{4E7BBA84-D6E3-853E-0513-6FA97C91A934}"/>
-                </a:ext>
-              </a:extLst>
-            </p:cNvPr>
+            <p:cNvPr id="1054" name="文本框 1053"/>
             <p:cNvSpPr txBox="1"/>
             <p:nvPr/>
           </p:nvSpPr>
@@ -7117,13 +6992,7 @@
         </p:sp>
         <p:sp>
           <p:nvSpPr>
-            <p:cNvPr id="1055" name="文本框 1054">
-              <a:extLst>
-                <a:ext uri="{FF2B5EF4-FFF2-40B4-BE49-F238E27FC236}">
-                  <a16:creationId xmlns:a16="http://schemas.microsoft.com/office/drawing/2014/main" id="{F8BE985F-165B-0E16-9DEA-1C8D3537B18B}"/>
-                </a:ext>
-              </a:extLst>
-            </p:cNvPr>
+            <p:cNvPr id="1055" name="文本框 1054"/>
             <p:cNvSpPr txBox="1"/>
             <p:nvPr/>
           </p:nvSpPr>
@@ -7155,13 +7024,7 @@
         </p:sp>
         <p:sp>
           <p:nvSpPr>
-            <p:cNvPr id="1068" name="菱形 1067">
-              <a:extLst>
-                <a:ext uri="{FF2B5EF4-FFF2-40B4-BE49-F238E27FC236}">
-                  <a16:creationId xmlns:a16="http://schemas.microsoft.com/office/drawing/2014/main" id="{9B86E7AF-2933-9902-858D-ED8A84D006D9}"/>
-                </a:ext>
-              </a:extLst>
-            </p:cNvPr>
+            <p:cNvPr id="1068" name="菱形 1067"/>
             <p:cNvSpPr/>
             <p:nvPr/>
           </p:nvSpPr>
@@ -7212,13 +7075,7 @@
         </p:sp>
         <p:sp>
           <p:nvSpPr>
-            <p:cNvPr id="1069" name="菱形 1068">
-              <a:extLst>
-                <a:ext uri="{FF2B5EF4-FFF2-40B4-BE49-F238E27FC236}">
-                  <a16:creationId xmlns:a16="http://schemas.microsoft.com/office/drawing/2014/main" id="{971CDD73-99D7-8B85-DD56-3CC1E50508AB}"/>
-                </a:ext>
-              </a:extLst>
-            </p:cNvPr>
+            <p:cNvPr id="1069" name="菱形 1068"/>
             <p:cNvSpPr/>
             <p:nvPr/>
           </p:nvSpPr>
@@ -7269,13 +7126,7 @@
         </p:sp>
         <p:sp>
           <p:nvSpPr>
-            <p:cNvPr id="1070" name="菱形 1069">
-              <a:extLst>
-                <a:ext uri="{FF2B5EF4-FFF2-40B4-BE49-F238E27FC236}">
-                  <a16:creationId xmlns:a16="http://schemas.microsoft.com/office/drawing/2014/main" id="{44581D1C-4BF4-80CE-3C5E-A9BE0666766F}"/>
-                </a:ext>
-              </a:extLst>
-            </p:cNvPr>
+            <p:cNvPr id="1070" name="菱形 1069"/>
             <p:cNvSpPr/>
             <p:nvPr/>
           </p:nvSpPr>
@@ -7326,13 +7177,7 @@
         </p:sp>
         <p:sp>
           <p:nvSpPr>
-            <p:cNvPr id="1071" name="菱形 1070">
-              <a:extLst>
-                <a:ext uri="{FF2B5EF4-FFF2-40B4-BE49-F238E27FC236}">
-                  <a16:creationId xmlns:a16="http://schemas.microsoft.com/office/drawing/2014/main" id="{6CD08E20-2E1C-69D7-2571-5CFE8FB327DC}"/>
-                </a:ext>
-              </a:extLst>
-            </p:cNvPr>
+            <p:cNvPr id="1071" name="菱形 1070"/>
             <p:cNvSpPr/>
             <p:nvPr/>
           </p:nvSpPr>
@@ -7383,13 +7228,7 @@
         </p:sp>
         <p:sp>
           <p:nvSpPr>
-            <p:cNvPr id="1072" name="菱形 1071">
-              <a:extLst>
-                <a:ext uri="{FF2B5EF4-FFF2-40B4-BE49-F238E27FC236}">
-                  <a16:creationId xmlns:a16="http://schemas.microsoft.com/office/drawing/2014/main" id="{D7F97177-1175-CB01-D0F6-0353E963A701}"/>
-                </a:ext>
-              </a:extLst>
-            </p:cNvPr>
+            <p:cNvPr id="1072" name="菱形 1071"/>
             <p:cNvSpPr/>
             <p:nvPr/>
           </p:nvSpPr>
@@ -7440,13 +7279,7 @@
         </p:sp>
         <p:sp>
           <p:nvSpPr>
-            <p:cNvPr id="1073" name="菱形 1072">
-              <a:extLst>
-                <a:ext uri="{FF2B5EF4-FFF2-40B4-BE49-F238E27FC236}">
-                  <a16:creationId xmlns:a16="http://schemas.microsoft.com/office/drawing/2014/main" id="{454903BD-C9A9-434D-1F77-3D75950BAFDE}"/>
-                </a:ext>
-              </a:extLst>
-            </p:cNvPr>
+            <p:cNvPr id="1073" name="菱形 1072"/>
             <p:cNvSpPr/>
             <p:nvPr/>
           </p:nvSpPr>
@@ -7497,13 +7330,7 @@
         </p:sp>
         <p:sp>
           <p:nvSpPr>
-            <p:cNvPr id="1074" name="菱形 1073">
-              <a:extLst>
-                <a:ext uri="{FF2B5EF4-FFF2-40B4-BE49-F238E27FC236}">
-                  <a16:creationId xmlns:a16="http://schemas.microsoft.com/office/drawing/2014/main" id="{49DDB1D2-514D-4DB2-8CF4-D6A8A0106EFF}"/>
-                </a:ext>
-              </a:extLst>
-            </p:cNvPr>
+            <p:cNvPr id="1074" name="菱形 1073"/>
             <p:cNvSpPr/>
             <p:nvPr/>
           </p:nvSpPr>
@@ -7554,13 +7381,7 @@
         </p:sp>
         <p:sp>
           <p:nvSpPr>
-            <p:cNvPr id="1075" name="任意多边形: 形状 1074">
-              <a:extLst>
-                <a:ext uri="{FF2B5EF4-FFF2-40B4-BE49-F238E27FC236}">
-                  <a16:creationId xmlns:a16="http://schemas.microsoft.com/office/drawing/2014/main" id="{CB8CEBF6-B5C5-2B8A-6CE3-A5B5C306050F}"/>
-                </a:ext>
-              </a:extLst>
-            </p:cNvPr>
+            <p:cNvPr id="1075" name="任意多边形: 形状 1074"/>
             <p:cNvSpPr/>
             <p:nvPr/>
           </p:nvSpPr>
@@ -7650,13 +7471,7 @@
         </p:sp>
         <p:sp>
           <p:nvSpPr>
-            <p:cNvPr id="1077" name="文本框 1076">
-              <a:extLst>
-                <a:ext uri="{FF2B5EF4-FFF2-40B4-BE49-F238E27FC236}">
-                  <a16:creationId xmlns:a16="http://schemas.microsoft.com/office/drawing/2014/main" id="{F8782580-9707-7344-BBA4-314F2F341060}"/>
-                </a:ext>
-              </a:extLst>
-            </p:cNvPr>
+            <p:cNvPr id="1077" name="文本框 1076"/>
             <p:cNvSpPr txBox="1"/>
             <p:nvPr/>
           </p:nvSpPr>
@@ -7692,13 +7507,7 @@
         </p:sp>
         <p:sp>
           <p:nvSpPr>
-            <p:cNvPr id="1078" name="任意多边形: 形状 1077">
-              <a:extLst>
-                <a:ext uri="{FF2B5EF4-FFF2-40B4-BE49-F238E27FC236}">
-                  <a16:creationId xmlns:a16="http://schemas.microsoft.com/office/drawing/2014/main" id="{CCFA90B8-27BB-B5D1-E93C-47E3D69B4FFF}"/>
-                </a:ext>
-              </a:extLst>
-            </p:cNvPr>
+            <p:cNvPr id="1078" name="任意多边形: 形状 1077"/>
             <p:cNvSpPr/>
             <p:nvPr/>
           </p:nvSpPr>
@@ -7772,13 +7581,7 @@
       </p:grpSp>
       <p:grpSp>
         <p:nvGrpSpPr>
-          <p:cNvPr id="1083" name="组合 1082">
-            <a:extLst>
-              <a:ext uri="{FF2B5EF4-FFF2-40B4-BE49-F238E27FC236}">
-                <a16:creationId xmlns:a16="http://schemas.microsoft.com/office/drawing/2014/main" id="{8861E3BB-D90A-3F22-BA6D-5AA6D54C8457}"/>
-              </a:ext>
-            </a:extLst>
-          </p:cNvPr>
+          <p:cNvPr id="1083" name="组合 1082"/>
           <p:cNvGrpSpPr/>
           <p:nvPr/>
         </p:nvGrpSpPr>
@@ -7792,15 +7595,8 @@
         </p:grpSpPr>
         <p:cxnSp>
           <p:nvCxnSpPr>
-            <p:cNvPr id="1084" name="直接连接符 1083">
-              <a:extLst>
-                <a:ext uri="{FF2B5EF4-FFF2-40B4-BE49-F238E27FC236}">
-                  <a16:creationId xmlns:a16="http://schemas.microsoft.com/office/drawing/2014/main" id="{35717D6E-F2A1-ECE3-BB16-EC4ACE05723C}"/>
-                </a:ext>
-              </a:extLst>
-            </p:cNvPr>
+            <p:cNvPr id="1084" name="直接连接符 1083"/>
             <p:cNvCxnSpPr>
-              <a:cxnSpLocks/>
               <a:stCxn id="1085" idx="1"/>
               <a:endCxn id="1085" idx="3"/>
             </p:cNvCxnSpPr>
@@ -7842,13 +7638,7 @@
         </p:cxnSp>
         <p:sp>
           <p:nvSpPr>
-            <p:cNvPr id="1085" name="双括号 1084">
-              <a:extLst>
-                <a:ext uri="{FF2B5EF4-FFF2-40B4-BE49-F238E27FC236}">
-                  <a16:creationId xmlns:a16="http://schemas.microsoft.com/office/drawing/2014/main" id="{B91A4BBC-3E41-69D1-F2BB-21D447E02E35}"/>
-                </a:ext>
-              </a:extLst>
-            </p:cNvPr>
+            <p:cNvPr id="1085" name="双括号 1084"/>
             <p:cNvSpPr/>
             <p:nvPr/>
           </p:nvSpPr>
@@ -7965,6 +7755,11 @@
               </a:rPr>
               <a:t>Questions?</a:t>
             </a:r>
+            <a:endParaRPr sz="6600" i="0" dirty="0">
+              <a:latin typeface="Arial" panose="020B0604020202020204" pitchFamily="34" charset="0"/>
+              <a:ea typeface="Roboto"/>
+              <a:cs typeface="Arial" panose="020B0604020202020204" pitchFamily="34" charset="0"/>
+            </a:endParaRPr>
           </a:p>
         </p:txBody>
       </p:sp>
@@ -7990,7 +7785,6 @@
           <a:p>
             <a:fld id="{C1FF6DA9-008F-8B48-92A6-B652298478BF}" type="slidenum">
               <a:rPr lang="en-US" smtClean="0"/>
-              <a:t>7</a:t>
             </a:fld>
             <a:endParaRPr lang="en-US"/>
           </a:p>
@@ -8335,7 +8129,6 @@
       </a:style>
     </a:lnDef>
   </a:objectDefaults>
-  <a:extraClrSchemeLst/>
   <a:extLst>
     <a:ext uri="{05A4C25C-085E-4340-85A3-A5531E510DB2}">
       <thm15:themeFamily xmlns:thm15="http://schemas.microsoft.com/office/thememl/2012/main" name="Office Theme" id="{62F939B6-93AF-4DB8-9C6B-D6C7DFDC589F}" vid="{4A3C46E8-61CC-4603-A589-7422A47A8E4A}"/>
@@ -8595,8 +8388,6 @@
       </a:bgFillStyleLst>
     </a:fmtScheme>
   </a:themeElements>
-  <a:objectDefaults/>
-  <a:extraClrSchemeLst/>
   <a:extLst>
     <a:ext uri="{05A4C25C-085E-4340-85A3-A5531E510DB2}">
       <thm15:themeFamily xmlns:thm15="http://schemas.microsoft.com/office/thememl/2012/main" name="Office Theme" id="{62F939B6-93AF-4DB8-9C6B-D6C7DFDC589F}" vid="{4A3C46E8-61CC-4603-A589-7422A47A8E4A}"/>
